--- a/Final/Van_der_Pol_Visualization_Presentation.pptx
+++ b/Final/Van_der_Pol_Visualization_Presentation.pptx
@@ -3153,7 +3153,7 @@
         <p:spPr>
           <a:xfrm>
             <a:off x="0" y="2286000"/>
-            <a:ext cx="12188952" cy="2286000"/>
+            <a:ext cx="12188952" cy="2331720"/>
           </a:xfrm>
           <a:prstGeom prst="rect">
             <a:avLst/>
@@ -3195,8 +3195,8 @@
         </p:nvSpPr>
         <p:spPr>
           <a:xfrm>
-            <a:off x="457200" y="502920"/>
-            <a:ext cx="11247120" cy="1005840"/>
+            <a:off x="457200" y="457200"/>
+            <a:ext cx="11247120" cy="1051560"/>
           </a:xfrm>
           <a:prstGeom prst="rect">
             <a:avLst/>
@@ -3211,7 +3211,7 @@
           <a:p>
             <a:pPr algn="ctr"/>
             <a:r>
-              <a:rPr sz="4800" b="1">
+              <a:rPr sz="5000" b="1">
                 <a:solidFill>
                   <a:srgbClr val="FFFFFF"/>
                 </a:solidFill>
@@ -3229,8 +3229,8 @@
         </p:nvSpPr>
         <p:spPr>
           <a:xfrm>
-            <a:off x="457200" y="1417320"/>
-            <a:ext cx="11247120" cy="594360"/>
+            <a:off x="457200" y="1463040"/>
+            <a:ext cx="11247120" cy="640080"/>
           </a:xfrm>
           <a:prstGeom prst="rect">
             <a:avLst/>
@@ -3298,7 +3298,7 @@
         <p:spPr>
           <a:xfrm>
             <a:off x="457200" y="2971800"/>
-            <a:ext cx="11247120" cy="548640"/>
+            <a:ext cx="11247120" cy="594360"/>
           </a:xfrm>
           <a:prstGeom prst="rect">
             <a:avLst/>
@@ -3313,7 +3313,7 @@
           <a:p>
             <a:pPr algn="ctr"/>
             <a:r>
-              <a:rPr sz="2200" b="1">
+              <a:rPr sz="2400" b="1">
                 <a:solidFill>
                   <a:srgbClr val="FFFFFF"/>
                 </a:solidFill>
@@ -3331,7 +3331,7 @@
         </p:nvSpPr>
         <p:spPr>
           <a:xfrm>
-            <a:off x="457200" y="6080760"/>
+            <a:off x="457200" y="6126480"/>
             <a:ext cx="11247120" cy="502920"/>
           </a:xfrm>
           <a:prstGeom prst="rect">
@@ -3384,7 +3384,7 @@
         <p:spPr>
           <a:xfrm>
             <a:off x="0" y="0"/>
-            <a:ext cx="12188952" cy="1005840"/>
+            <a:ext cx="12188952" cy="1051560"/>
           </a:xfrm>
           <a:prstGeom prst="rect">
             <a:avLst/>
@@ -3426,8 +3426,8 @@
         </p:nvSpPr>
         <p:spPr>
           <a:xfrm>
-            <a:off x="228600" y="45720"/>
-            <a:ext cx="9144000" cy="594360"/>
+            <a:off x="274320" y="54864"/>
+            <a:ext cx="11640312" cy="640080"/>
           </a:xfrm>
           <a:prstGeom prst="rect">
             <a:avLst/>
@@ -3447,7 +3447,7 @@
                   <a:srgbClr val="FFFFFF"/>
                 </a:solidFill>
               </a:rPr>
-              <a:t>Visualization 6 — Barycentric Lagrange Interpolation</a:t>
+              <a:t>Visualization 6: Barycentric Lagrange Interpolation</a:t>
             </a:r>
           </a:p>
         </p:txBody>
@@ -3460,8 +3460,8 @@
         </p:nvSpPr>
         <p:spPr>
           <a:xfrm>
-            <a:off x="228600" y="594360"/>
-            <a:ext cx="9144000" cy="365760"/>
+            <a:off x="274320" y="676656"/>
+            <a:ext cx="11640312" cy="347472"/>
           </a:xfrm>
           <a:prstGeom prst="rect">
             <a:avLst/>
@@ -3486,9 +3486,52 @@
           </a:p>
         </p:txBody>
       </p:sp>
+      <p:sp>
+        <p:nvSpPr>
+          <p:cNvPr id="5" name="Rectangle 4"/>
+          <p:cNvSpPr/>
+          <p:nvPr/>
+        </p:nvSpPr>
+        <p:spPr>
+          <a:xfrm>
+            <a:off x="6446520" y="1078992"/>
+            <a:ext cx="5650992" cy="5504688"/>
+          </a:xfrm>
+          <a:prstGeom prst="rect">
+            <a:avLst/>
+          </a:prstGeom>
+          <a:solidFill>
+            <a:srgbClr val="F0F4FA"/>
+          </a:solidFill>
+          <a:ln>
+            <a:noFill/>
+          </a:ln>
+        </p:spPr>
+        <p:style>
+          <a:lnRef idx="1">
+            <a:schemeClr val="accent1"/>
+          </a:lnRef>
+          <a:fillRef idx="3">
+            <a:schemeClr val="accent1"/>
+          </a:fillRef>
+          <a:effectRef idx="2">
+            <a:schemeClr val="accent1"/>
+          </a:effectRef>
+          <a:fontRef idx="minor">
+            <a:schemeClr val="lt1"/>
+          </a:fontRef>
+        </p:style>
+        <p:txBody>
+          <a:bodyPr rtlCol="0" anchor="ctr"/>
+          <a:lstStyle/>
+          <a:p>
+            <a:pPr algn="ctr"/>
+          </a:p>
+        </p:txBody>
+      </p:sp>
       <p:pic>
         <p:nvPicPr>
-          <p:cNvPr id="5" name="Picture 4" descr="page6.png"/>
+          <p:cNvPr id="6" name="Picture 5" descr="page6.png"/>
           <p:cNvPicPr>
             <a:picLocks noChangeAspect="1"/>
           </p:cNvPicPr>
@@ -3502,8 +3545,8 @@
         </p:blipFill>
         <p:spPr>
           <a:xfrm>
-            <a:off x="182880" y="1078992"/>
-            <a:ext cx="6309360" cy="4754880"/>
+            <a:off x="1476960" y="1078992"/>
+            <a:ext cx="3538319" cy="5504688"/>
           </a:xfrm>
           <a:prstGeom prst="rect">
             <a:avLst/>
@@ -3512,14 +3555,14 @@
       </p:pic>
       <p:sp>
         <p:nvSpPr>
-          <p:cNvPr id="6" name="TextBox 5"/>
+          <p:cNvPr id="7" name="TextBox 6"/>
           <p:cNvSpPr txBox="1"/>
           <p:nvPr/>
         </p:nvSpPr>
         <p:spPr>
           <a:xfrm>
-            <a:off x="6766560" y="1143000"/>
-            <a:ext cx="5239512" cy="5394960"/>
+            <a:off x="6583679" y="1170432"/>
+            <a:ext cx="5376672" cy="5321808"/>
           </a:xfrm>
           <a:prstGeom prst="rect">
             <a:avLst/>
@@ -3534,28 +3577,74 @@
           <a:p>
             <a:pPr>
               <a:spcBef>
-                <a:spcPts val="300"/>
-              </a:spcBef>
-              <a:spcAft>
+                <a:spcPts val="400"/>
+              </a:spcBef>
+              <a:spcAft>
+                <a:spcPts val="0"/>
+              </a:spcAft>
+            </a:pPr>
+            <a:r>
+              <a:rPr sz="1300" b="1">
+                <a:solidFill>
+                  <a:srgbClr val="C55A11"/>
+                </a:solidFill>
+              </a:rPr>
+              <a:t>WHAT</a:t>
+            </a:r>
+          </a:p>
+          <a:p>
+            <a:pPr>
+              <a:spcBef>
                 <a:spcPts val="200"/>
+              </a:spcBef>
+              <a:spcAft>
+                <a:spcPts val="0"/>
+              </a:spcAft>
+            </a:pPr>
+            <a:r>
+              <a:rPr sz="1300" b="0">
+                <a:solidFill>
+                  <a:srgbClr val="3C3C3C"/>
+                </a:solidFill>
+              </a:rPr>
+              <a:t>Four panels: interpolated x(t) and x'(t) compared to RK4 truth, pointwise error on a log scale, and max-error convergence vs polynomial degree n. Red is equispaced, teal is Chebyshev.</a:t>
+            </a:r>
+          </a:p>
+          <a:p>
+            <a:pPr>
+              <a:spcBef>
+                <a:spcPts val="600"/>
+              </a:spcBef>
+              <a:spcAft>
+                <a:spcPts val="0"/>
+              </a:spcAft>
+            </a:pPr>
+          </a:p>
+          <a:p>
+            <a:pPr>
+              <a:spcBef>
+                <a:spcPts val="0"/>
+              </a:spcBef>
+              <a:spcAft>
+                <a:spcPts val="0"/>
               </a:spcAft>
             </a:pPr>
             <a:r>
               <a:rPr sz="1300" b="1">
                 <a:solidFill>
-                  <a:srgbClr val="C55A11"/>
-                </a:solidFill>
-              </a:rPr>
-              <a:t>WHAT</a:t>
-            </a:r>
-          </a:p>
-          <a:p>
-            <a:pPr>
-              <a:spcBef>
-                <a:spcPts val="300"/>
-              </a:spcBef>
-              <a:spcAft>
+                  <a:srgbClr val="008C8C"/>
+                </a:solidFill>
+              </a:rPr>
+              <a:t>WHY</a:t>
+            </a:r>
+          </a:p>
+          <a:p>
+            <a:pPr>
+              <a:spcBef>
                 <a:spcPts val="200"/>
+              </a:spcBef>
+              <a:spcAft>
+                <a:spcPts val="0"/>
               </a:spcAft>
             </a:pPr>
             <a:r>
@@ -3564,115 +3653,53 @@
                   <a:srgbClr val="3C3C3C"/>
                 </a:solidFill>
               </a:rPr>
-              <a:t>Four panels: interpolated x(t) and ẋ(t) vs RK4 truth, pointwise error (log scale), and convergence of max error vs polynomial degree n.  Red = equispaced, teal = Chebyshev.</a:t>
-            </a:r>
-          </a:p>
-          <a:p>
-            <a:pPr>
-              <a:spcBef>
-                <a:spcPts val="300"/>
-              </a:spcBef>
-              <a:spcAft>
+              <a:t>Running the full ODE at every time step is expensive. Interpolation rebuilds the signal from a small number of key samples. This page shows which node strategy works better and where each one breaks down.</a:t>
+            </a:r>
+          </a:p>
+          <a:p>
+            <a:pPr>
+              <a:spcBef>
+                <a:spcPts val="600"/>
+              </a:spcBef>
+              <a:spcAft>
+                <a:spcPts val="0"/>
+              </a:spcAft>
+            </a:pPr>
+          </a:p>
+          <a:p>
+            <a:pPr>
+              <a:spcBef>
+                <a:spcPts val="0"/>
+              </a:spcBef>
+              <a:spcAft>
+                <a:spcPts val="0"/>
+              </a:spcAft>
+            </a:pPr>
+            <a:r>
+              <a:rPr sz="1300" b="1">
+                <a:solidFill>
+                  <a:srgbClr val="1F4E79"/>
+                </a:solidFill>
+              </a:rPr>
+              <a:t>HOW</a:t>
+            </a:r>
+          </a:p>
+          <a:p>
+            <a:pPr>
+              <a:spcBef>
                 <a:spcPts val="200"/>
-              </a:spcAft>
-            </a:pPr>
-            <a:r>
-              <a:rPr sz="500" b="0">
+              </a:spcBef>
+              <a:spcAft>
+                <a:spcPts val="0"/>
+              </a:spcAft>
+            </a:pPr>
+            <a:r>
+              <a:rPr sz="1300" b="0">
                 <a:solidFill>
                   <a:srgbClr val="3C3C3C"/>
                 </a:solidFill>
               </a:rPr>
-              <a:t/>
-            </a:r>
-          </a:p>
-          <a:p>
-            <a:pPr>
-              <a:spcBef>
-                <a:spcPts val="300"/>
-              </a:spcBef>
-              <a:spcAft>
-                <a:spcPts val="200"/>
-              </a:spcAft>
-            </a:pPr>
-            <a:r>
-              <a:rPr sz="1300" b="1">
-                <a:solidFill>
-                  <a:srgbClr val="008C8C"/>
-                </a:solidFill>
-              </a:rPr>
-              <a:t>WHY</a:t>
-            </a:r>
-          </a:p>
-          <a:p>
-            <a:pPr>
-              <a:spcBef>
-                <a:spcPts val="300"/>
-              </a:spcBef>
-              <a:spcAft>
-                <a:spcPts val="200"/>
-              </a:spcAft>
-            </a:pPr>
-            <a:r>
-              <a:rPr sz="1300" b="0">
-                <a:solidFill>
-                  <a:srgbClr val="3C3C3C"/>
-                </a:solidFill>
-              </a:rPr>
-              <a:t>Solving the ODE at every timestep is expensive. Interpolation reconstructs the signal from a few key samples. This page shows which node strategy wins — and where each fails.</a:t>
-            </a:r>
-          </a:p>
-          <a:p>
-            <a:pPr>
-              <a:spcBef>
-                <a:spcPts val="300"/>
-              </a:spcBef>
-              <a:spcAft>
-                <a:spcPts val="200"/>
-              </a:spcAft>
-            </a:pPr>
-            <a:r>
-              <a:rPr sz="500" b="0">
-                <a:solidFill>
-                  <a:srgbClr val="3C3C3C"/>
-                </a:solidFill>
-              </a:rPr>
-              <a:t/>
-            </a:r>
-          </a:p>
-          <a:p>
-            <a:pPr>
-              <a:spcBef>
-                <a:spcPts val="300"/>
-              </a:spcBef>
-              <a:spcAft>
-                <a:spcPts val="200"/>
-              </a:spcAft>
-            </a:pPr>
-            <a:r>
-              <a:rPr sz="1300" b="1">
-                <a:solidFill>
-                  <a:srgbClr val="1F4E79"/>
-                </a:solidFill>
-              </a:rPr>
-              <a:t>HOW</a:t>
-            </a:r>
-          </a:p>
-          <a:p>
-            <a:pPr>
-              <a:spcBef>
-                <a:spcPts val="300"/>
-              </a:spcBef>
-              <a:spcAft>
-                <a:spcPts val="200"/>
-              </a:spcAft>
-            </a:pPr>
-            <a:r>
-              <a:rPr sz="1300" b="0">
-                <a:solidFill>
-                  <a:srgbClr val="3C3C3C"/>
-                </a:solidFill>
-              </a:rPr>
-              <a:t>RK4 truth sampled at n points. Barycentric weights computed; interpolant evaluated on a dense grid. Error = |truth − interpolant|. Degree slider updates all four panels live.</a:t>
+              <a:t>RK4 truth is sampled at n points. Barycentric weights are computed and the interpolant is evaluated on a dense grid. Error = |truth minus interpolant|. The degree slider updates all four panels live.</a:t>
             </a:r>
           </a:p>
         </p:txBody>
@@ -3704,7 +3731,7 @@
         <p:spPr>
           <a:xfrm>
             <a:off x="0" y="0"/>
-            <a:ext cx="12188952" cy="1005840"/>
+            <a:ext cx="12188952" cy="1051560"/>
           </a:xfrm>
           <a:prstGeom prst="rect">
             <a:avLst/>
@@ -3746,8 +3773,8 @@
         </p:nvSpPr>
         <p:spPr>
           <a:xfrm>
-            <a:off x="228600" y="45720"/>
-            <a:ext cx="9144000" cy="594360"/>
+            <a:off x="274320" y="54864"/>
+            <a:ext cx="11640312" cy="640080"/>
           </a:xfrm>
           <a:prstGeom prst="rect">
             <a:avLst/>
@@ -3767,7 +3794,7 @@
                   <a:srgbClr val="FFFFFF"/>
                 </a:solidFill>
               </a:rPr>
-              <a:t>Visualization 7 — Parametric Surrogate vs μ</a:t>
+              <a:t>Visualization 7: Parametric Surrogate vs μ</a:t>
             </a:r>
           </a:p>
         </p:txBody>
@@ -3780,8 +3807,8 @@
         </p:nvSpPr>
         <p:spPr>
           <a:xfrm>
-            <a:off x="228600" y="594360"/>
-            <a:ext cx="9144000" cy="365760"/>
+            <a:off x="274320" y="676656"/>
+            <a:ext cx="11640312" cy="347472"/>
           </a:xfrm>
           <a:prstGeom prst="rect">
             <a:avLst/>
@@ -3806,9 +3833,52 @@
           </a:p>
         </p:txBody>
       </p:sp>
+      <p:sp>
+        <p:nvSpPr>
+          <p:cNvPr id="5" name="Rectangle 4"/>
+          <p:cNvSpPr/>
+          <p:nvPr/>
+        </p:nvSpPr>
+        <p:spPr>
+          <a:xfrm>
+            <a:off x="91440" y="1078992"/>
+            <a:ext cx="5650992" cy="5504688"/>
+          </a:xfrm>
+          <a:prstGeom prst="rect">
+            <a:avLst/>
+          </a:prstGeom>
+          <a:solidFill>
+            <a:srgbClr val="F0F4FA"/>
+          </a:solidFill>
+          <a:ln>
+            <a:noFill/>
+          </a:ln>
+        </p:spPr>
+        <p:style>
+          <a:lnRef idx="1">
+            <a:schemeClr val="accent1"/>
+          </a:lnRef>
+          <a:fillRef idx="3">
+            <a:schemeClr val="accent1"/>
+          </a:fillRef>
+          <a:effectRef idx="2">
+            <a:schemeClr val="accent1"/>
+          </a:effectRef>
+          <a:fontRef idx="minor">
+            <a:schemeClr val="lt1"/>
+          </a:fontRef>
+        </p:style>
+        <p:txBody>
+          <a:bodyPr rtlCol="0" anchor="ctr"/>
+          <a:lstStyle/>
+          <a:p>
+            <a:pPr algn="ctr"/>
+          </a:p>
+        </p:txBody>
+      </p:sp>
       <p:pic>
         <p:nvPicPr>
-          <p:cNvPr id="5" name="Picture 4" descr="page7.png"/>
+          <p:cNvPr id="6" name="Picture 5" descr="page7.png"/>
           <p:cNvPicPr>
             <a:picLocks noChangeAspect="1"/>
           </p:cNvPicPr>
@@ -3822,8 +3892,8 @@
         </p:blipFill>
         <p:spPr>
           <a:xfrm>
-            <a:off x="5696712" y="1078992"/>
-            <a:ext cx="6309360" cy="4754880"/>
+            <a:off x="6208321" y="1078992"/>
+            <a:ext cx="5469020" cy="5504688"/>
           </a:xfrm>
           <a:prstGeom prst="rect">
             <a:avLst/>
@@ -3832,14 +3902,14 @@
       </p:pic>
       <p:sp>
         <p:nvSpPr>
-          <p:cNvPr id="6" name="TextBox 5"/>
+          <p:cNvPr id="7" name="TextBox 6"/>
           <p:cNvSpPr txBox="1"/>
           <p:nvPr/>
         </p:nvSpPr>
         <p:spPr>
           <a:xfrm>
-            <a:off x="274320" y="1143000"/>
-            <a:ext cx="5239512" cy="5394960"/>
+            <a:off x="228600" y="1170432"/>
+            <a:ext cx="5376672" cy="5321808"/>
           </a:xfrm>
           <a:prstGeom prst="rect">
             <a:avLst/>
@@ -3854,28 +3924,74 @@
           <a:p>
             <a:pPr>
               <a:spcBef>
-                <a:spcPts val="300"/>
-              </a:spcBef>
-              <a:spcAft>
+                <a:spcPts val="400"/>
+              </a:spcBef>
+              <a:spcAft>
+                <a:spcPts val="0"/>
+              </a:spcAft>
+            </a:pPr>
+            <a:r>
+              <a:rPr sz="1300" b="1">
+                <a:solidFill>
+                  <a:srgbClr val="C55A11"/>
+                </a:solidFill>
+              </a:rPr>
+              <a:t>WHAT</a:t>
+            </a:r>
+          </a:p>
+          <a:p>
+            <a:pPr>
+              <a:spcBef>
                 <a:spcPts val="200"/>
+              </a:spcBef>
+              <a:spcAft>
+                <a:spcPts val="0"/>
+              </a:spcAft>
+            </a:pPr>
+            <a:r>
+              <a:rPr sz="1300" b="0">
+                <a:solidFill>
+                  <a:srgbClr val="3C3C3C"/>
+                </a:solidFill>
+              </a:rPr>
+              <a:t>Four panels: surrogate vs truth across μ, absolute error vs μ, max error vs training size N, and runtime vs N. Red is equispaced, teal is Chebyshev.</a:t>
+            </a:r>
+          </a:p>
+          <a:p>
+            <a:pPr>
+              <a:spcBef>
+                <a:spcPts val="600"/>
+              </a:spcBef>
+              <a:spcAft>
+                <a:spcPts val="0"/>
+              </a:spcAft>
+            </a:pPr>
+          </a:p>
+          <a:p>
+            <a:pPr>
+              <a:spcBef>
+                <a:spcPts val="0"/>
+              </a:spcBef>
+              <a:spcAft>
+                <a:spcPts val="0"/>
               </a:spcAft>
             </a:pPr>
             <a:r>
               <a:rPr sz="1300" b="1">
                 <a:solidFill>
-                  <a:srgbClr val="C55A11"/>
-                </a:solidFill>
-              </a:rPr>
-              <a:t>WHAT</a:t>
-            </a:r>
-          </a:p>
-          <a:p>
-            <a:pPr>
-              <a:spcBef>
-                <a:spcPts val="300"/>
-              </a:spcBef>
-              <a:spcAft>
+                  <a:srgbClr val="008C8C"/>
+                </a:solidFill>
+              </a:rPr>
+              <a:t>WHY</a:t>
+            </a:r>
+          </a:p>
+          <a:p>
+            <a:pPr>
+              <a:spcBef>
                 <a:spcPts val="200"/>
+              </a:spcBef>
+              <a:spcAft>
+                <a:spcPts val="0"/>
               </a:spcAft>
             </a:pPr>
             <a:r>
@@ -3884,115 +4000,53 @@
                   <a:srgbClr val="3C3C3C"/>
                 </a:solidFill>
               </a:rPr>
-              <a:t>Four panels: surrogate vs truth across μ, absolute error vs μ, max error vs training size N, and runtime vs N.  Red = equispaced, teal = Chebyshev.</a:t>
-            </a:r>
-          </a:p>
-          <a:p>
-            <a:pPr>
-              <a:spcBef>
-                <a:spcPts val="300"/>
-              </a:spcBef>
-              <a:spcAft>
+              <a:t>The practical payoff: run N training solves once, then query any μ instantly. The page shows both accuracy and cost in one place so you can make an informed choice.</a:t>
+            </a:r>
+          </a:p>
+          <a:p>
+            <a:pPr>
+              <a:spcBef>
+                <a:spcPts val="600"/>
+              </a:spcBef>
+              <a:spcAft>
+                <a:spcPts val="0"/>
+              </a:spcAft>
+            </a:pPr>
+          </a:p>
+          <a:p>
+            <a:pPr>
+              <a:spcBef>
+                <a:spcPts val="0"/>
+              </a:spcBef>
+              <a:spcAft>
+                <a:spcPts val="0"/>
+              </a:spcAft>
+            </a:pPr>
+            <a:r>
+              <a:rPr sz="1300" b="1">
+                <a:solidFill>
+                  <a:srgbClr val="1F4E79"/>
+                </a:solidFill>
+              </a:rPr>
+              <a:t>HOW</a:t>
+            </a:r>
+          </a:p>
+          <a:p>
+            <a:pPr>
+              <a:spcBef>
                 <a:spcPts val="200"/>
-              </a:spcAft>
-            </a:pPr>
-            <a:r>
-              <a:rPr sz="500" b="0">
+              </a:spcBef>
+              <a:spcAft>
+                <a:spcPts val="0"/>
+              </a:spcAft>
+            </a:pPr>
+            <a:r>
+              <a:rPr sz="1300" b="0">
                 <a:solidFill>
                   <a:srgbClr val="3C3C3C"/>
                 </a:solidFill>
               </a:rPr>
-              <a:t/>
-            </a:r>
-          </a:p>
-          <a:p>
-            <a:pPr>
-              <a:spcBef>
-                <a:spcPts val="300"/>
-              </a:spcBef>
-              <a:spcAft>
-                <a:spcPts val="200"/>
-              </a:spcAft>
-            </a:pPr>
-            <a:r>
-              <a:rPr sz="1300" b="1">
-                <a:solidFill>
-                  <a:srgbClr val="008C8C"/>
-                </a:solidFill>
-              </a:rPr>
-              <a:t>WHY</a:t>
-            </a:r>
-          </a:p>
-          <a:p>
-            <a:pPr>
-              <a:spcBef>
-                <a:spcPts val="300"/>
-              </a:spcBef>
-              <a:spcAft>
-                <a:spcPts val="200"/>
-              </a:spcAft>
-            </a:pPr>
-            <a:r>
-              <a:rPr sz="1300" b="0">
-                <a:solidFill>
-                  <a:srgbClr val="3C3C3C"/>
-                </a:solidFill>
-              </a:rPr>
-              <a:t>This is the practical payoff: run N training solves once, then answer 'what happens at this μ?' instantly. The page quantifies the accuracy–cost tradeoff so you can choose wisely.</a:t>
-            </a:r>
-          </a:p>
-          <a:p>
-            <a:pPr>
-              <a:spcBef>
-                <a:spcPts val="300"/>
-              </a:spcBef>
-              <a:spcAft>
-                <a:spcPts val="200"/>
-              </a:spcAft>
-            </a:pPr>
-            <a:r>
-              <a:rPr sz="500" b="0">
-                <a:solidFill>
-                  <a:srgbClr val="3C3C3C"/>
-                </a:solidFill>
-              </a:rPr>
-              <a:t/>
-            </a:r>
-          </a:p>
-          <a:p>
-            <a:pPr>
-              <a:spcBef>
-                <a:spcPts val="300"/>
-              </a:spcBef>
-              <a:spcAft>
-                <a:spcPts val="200"/>
-              </a:spcAft>
-            </a:pPr>
-            <a:r>
-              <a:rPr sz="1300" b="1">
-                <a:solidFill>
-                  <a:srgbClr val="1F4E79"/>
-                </a:solidFill>
-              </a:rPr>
-              <a:t>HOW</a:t>
-            </a:r>
-          </a:p>
-          <a:p>
-            <a:pPr>
-              <a:spcBef>
-                <a:spcPts val="300"/>
-              </a:spcBef>
-              <a:spcAft>
-                <a:spcPts val="200"/>
-              </a:spcAft>
-            </a:pPr>
-            <a:r>
-              <a:rPr sz="1300" b="0">
-                <a:solidFill>
-                  <a:srgbClr val="3C3C3C"/>
-                </a:solidFill>
-              </a:rPr>
-              <a:t>N ODE solutions run at chosen μ nodes. Barycentric surrogates built and evaluated on a dense μ grid. Error and runtime logged vs N. All panels update when N, node type, or t* changes.</a:t>
+              <a:t>N ODE solutions are run at chosen μ nodes. Barycentric surrogates are built and evaluated on a dense μ grid. Error and runtime are logged vs N. All panels update when you change N, node type, or snapshot time t*.</a:t>
             </a:r>
           </a:p>
         </p:txBody>
@@ -4024,7 +4078,7 @@
         <p:spPr>
           <a:xfrm>
             <a:off x="0" y="0"/>
-            <a:ext cx="12188952" cy="1005840"/>
+            <a:ext cx="12188952" cy="1051560"/>
           </a:xfrm>
           <a:prstGeom prst="rect">
             <a:avLst/>
@@ -4066,8 +4120,8 @@
         </p:nvSpPr>
         <p:spPr>
           <a:xfrm>
-            <a:off x="228600" y="91440"/>
-            <a:ext cx="11704320" cy="777240"/>
+            <a:off x="274320" y="54864"/>
+            <a:ext cx="11640312" cy="640080"/>
           </a:xfrm>
           <a:prstGeom prst="rect">
             <a:avLst/>
@@ -4082,7 +4136,7 @@
           <a:p>
             <a:pPr algn="l"/>
             <a:r>
-              <a:rPr sz="3200" b="1">
+              <a:rPr sz="2800" b="1">
                 <a:solidFill>
                   <a:srgbClr val="FFFFFF"/>
                 </a:solidFill>
@@ -4101,7 +4155,7 @@
         <p:spPr>
           <a:xfrm>
             <a:off x="457200" y="1188720"/>
-            <a:ext cx="11247120" cy="5303520"/>
+            <a:ext cx="11247120" cy="5394960"/>
           </a:xfrm>
           <a:prstGeom prst="rect">
             <a:avLst/>
@@ -4116,10 +4170,56 @@
           <a:p>
             <a:pPr>
               <a:spcBef>
-                <a:spcPts val="300"/>
-              </a:spcBef>
-              <a:spcAft>
+                <a:spcPts val="600"/>
+              </a:spcBef>
+              <a:spcAft>
+                <a:spcPts val="0"/>
+              </a:spcAft>
+            </a:pPr>
+            <a:r>
+              <a:rPr sz="1600" b="1">
+                <a:solidFill>
+                  <a:srgbClr val="1F4E79"/>
+                </a:solidFill>
+              </a:rPr>
+              <a:t>1.  μ is the master switch</a:t>
+            </a:r>
+          </a:p>
+          <a:p>
+            <a:pPr>
+              <a:spcBef>
                 <a:spcPts val="200"/>
+              </a:spcBef>
+              <a:spcAft>
+                <a:spcPts val="0"/>
+              </a:spcAft>
+            </a:pPr>
+            <a:r>
+              <a:rPr sz="1400" b="0">
+                <a:solidFill>
+                  <a:srgbClr val="3C3C3C"/>
+                </a:solidFill>
+              </a:rPr>
+              <a:t>One parameter shifts the system from smooth sine waves to sharp relaxation oscillations. You can see it on every page.</a:t>
+            </a:r>
+          </a:p>
+          <a:p>
+            <a:pPr>
+              <a:spcBef>
+                <a:spcPts val="800"/>
+              </a:spcBef>
+              <a:spcAft>
+                <a:spcPts val="0"/>
+              </a:spcAft>
+            </a:pPr>
+          </a:p>
+          <a:p>
+            <a:pPr>
+              <a:spcBef>
+                <a:spcPts val="0"/>
+              </a:spcBef>
+              <a:spcAft>
+                <a:spcPts val="0"/>
               </a:spcAft>
             </a:pPr>
             <a:r>
@@ -4128,16 +4228,16 @@
                   <a:srgbClr val="1F4E79"/>
                 </a:solidFill>
               </a:rPr>
-              <a:t>1.  μ is the master switch</a:t>
-            </a:r>
-          </a:p>
-          <a:p>
-            <a:pPr>
-              <a:spcBef>
-                <a:spcPts val="300"/>
-              </a:spcBef>
-              <a:spcAft>
+              <a:t>2.  The limit cycle is a global attractor</a:t>
+            </a:r>
+          </a:p>
+          <a:p>
+            <a:pPr>
+              <a:spcBef>
                 <a:spcPts val="200"/>
+              </a:spcBef>
+              <a:spcAft>
+                <a:spcPts val="0"/>
               </a:spcAft>
             </a:pPr>
             <a:r>
@@ -4146,34 +4246,118 @@
                   <a:srgbClr val="3C3C3C"/>
                 </a:solidFill>
               </a:rPr>
-              <a:t>One parameter transforms smooth sine waves into sharp relaxation oscillations — visible across every visualization page.</a:t>
-            </a:r>
-          </a:p>
-          <a:p>
-            <a:pPr>
-              <a:spcBef>
-                <a:spcPts val="300"/>
-              </a:spcBef>
-              <a:spcAft>
+              <a:t>No matter where you start, every trajectory ends on the same closed orbit. The system is predictable regardless of initial conditions.</a:t>
+            </a:r>
+          </a:p>
+          <a:p>
+            <a:pPr>
+              <a:spcBef>
+                <a:spcPts val="800"/>
+              </a:spcBef>
+              <a:spcAft>
+                <a:spcPts val="0"/>
+              </a:spcAft>
+            </a:pPr>
+          </a:p>
+          <a:p>
+            <a:pPr>
+              <a:spcBef>
+                <a:spcPts val="0"/>
+              </a:spcBef>
+              <a:spcAft>
+                <a:spcPts val="0"/>
+              </a:spcAft>
+            </a:pPr>
+            <a:r>
+              <a:rPr sz="1600" b="1">
+                <a:solidFill>
+                  <a:srgbClr val="1F4E79"/>
+                </a:solidFill>
+              </a:rPr>
+              <a:t>3.  Chebyshev nodes beat equispaced nodes</a:t>
+            </a:r>
+          </a:p>
+          <a:p>
+            <a:pPr>
+              <a:spcBef>
                 <a:spcPts val="200"/>
-              </a:spcAft>
-            </a:pPr>
-            <a:r>
-              <a:rPr sz="500" b="0">
+              </a:spcBef>
+              <a:spcAft>
+                <a:spcPts val="0"/>
+              </a:spcAft>
+            </a:pPr>
+            <a:r>
+              <a:rPr sz="1400" b="0">
                 <a:solidFill>
                   <a:srgbClr val="3C3C3C"/>
                 </a:solidFill>
               </a:rPr>
-              <a:t/>
-            </a:r>
-          </a:p>
-          <a:p>
-            <a:pPr>
-              <a:spcBef>
-                <a:spcPts val="300"/>
-              </a:spcBef>
-              <a:spcAft>
+              <a:t>Equispaced nodes at high polynomial degree cause Runge's phenomenon: wild oscillations near the boundaries. Chebyshev clustering avoids this and converges exponentially.</a:t>
+            </a:r>
+          </a:p>
+          <a:p>
+            <a:pPr>
+              <a:spcBef>
+                <a:spcPts val="800"/>
+              </a:spcBef>
+              <a:spcAft>
+                <a:spcPts val="0"/>
+              </a:spcAft>
+            </a:pPr>
+          </a:p>
+          <a:p>
+            <a:pPr>
+              <a:spcBef>
+                <a:spcPts val="0"/>
+              </a:spcBef>
+              <a:spcAft>
+                <a:spcPts val="0"/>
+              </a:spcAft>
+            </a:pPr>
+            <a:r>
+              <a:rPr sz="1600" b="1">
+                <a:solidFill>
+                  <a:srgbClr val="1F4E79"/>
+                </a:solidFill>
+              </a:rPr>
+              <a:t>4.  Cost vs accuracy is a real tradeoff</a:t>
+            </a:r>
+          </a:p>
+          <a:p>
+            <a:pPr>
+              <a:spcBef>
                 <a:spcPts val="200"/>
+              </a:spcBef>
+              <a:spcAft>
+                <a:spcPts val="0"/>
+              </a:spcAft>
+            </a:pPr>
+            <a:r>
+              <a:rPr sz="1400" b="0">
+                <a:solidFill>
+                  <a:srgbClr val="3C3C3C"/>
+                </a:solidFill>
+              </a:rPr>
+              <a:t>More training nodes means lower surrogate error but longer precomputation. Visualization 7 shows exactly how steep that tradeoff is.</a:t>
+            </a:r>
+          </a:p>
+          <a:p>
+            <a:pPr>
+              <a:spcBef>
+                <a:spcPts val="800"/>
+              </a:spcBef>
+              <a:spcAft>
+                <a:spcPts val="0"/>
+              </a:spcAft>
+            </a:pPr>
+          </a:p>
+          <a:p>
+            <a:pPr>
+              <a:spcBef>
+                <a:spcPts val="0"/>
+              </a:spcBef>
+              <a:spcAft>
+                <a:spcPts val="0"/>
               </a:spcAft>
             </a:pPr>
             <a:r>
@@ -4182,16 +4366,16 @@
                   <a:srgbClr val="1F4E79"/>
                 </a:solidFill>
               </a:rPr>
-              <a:t>2.  The limit cycle is a global attractor</a:t>
-            </a:r>
-          </a:p>
-          <a:p>
-            <a:pPr>
-              <a:spcBef>
-                <a:spcPts val="300"/>
-              </a:spcBef>
-              <a:spcAft>
+              <a:t>5.  Linked views beat isolated charts</a:t>
+            </a:r>
+          </a:p>
+          <a:p>
+            <a:pPr>
+              <a:spcBef>
                 <a:spcPts val="200"/>
+              </a:spcBef>
+              <a:spcAft>
+                <a:spcPts val="0"/>
               </a:spcAft>
             </a:pPr>
             <a:r>
@@ -4200,169 +4384,7 @@
                   <a:srgbClr val="3C3C3C"/>
                 </a:solidFill>
               </a:rPr>
-              <a:t>No matter where you start, every trajectory ends on the same closed orbit. This makes the system predictable and robust.</a:t>
-            </a:r>
-          </a:p>
-          <a:p>
-            <a:pPr>
-              <a:spcBef>
-                <a:spcPts val="300"/>
-              </a:spcBef>
-              <a:spcAft>
-                <a:spcPts val="200"/>
-              </a:spcAft>
-            </a:pPr>
-            <a:r>
-              <a:rPr sz="500" b="0">
-                <a:solidFill>
-                  <a:srgbClr val="3C3C3C"/>
-                </a:solidFill>
-              </a:rPr>
-              <a:t/>
-            </a:r>
-          </a:p>
-          <a:p>
-            <a:pPr>
-              <a:spcBef>
-                <a:spcPts val="300"/>
-              </a:spcBef>
-              <a:spcAft>
-                <a:spcPts val="200"/>
-              </a:spcAft>
-            </a:pPr>
-            <a:r>
-              <a:rPr sz="1600" b="1">
-                <a:solidFill>
-                  <a:srgbClr val="1F4E79"/>
-                </a:solidFill>
-              </a:rPr>
-              <a:t>3.  Chebyshev nodes beat equispaced nodes</a:t>
-            </a:r>
-          </a:p>
-          <a:p>
-            <a:pPr>
-              <a:spcBef>
-                <a:spcPts val="300"/>
-              </a:spcBef>
-              <a:spcAft>
-                <a:spcPts val="200"/>
-              </a:spcAft>
-            </a:pPr>
-            <a:r>
-              <a:rPr sz="1400" b="0">
-                <a:solidFill>
-                  <a:srgbClr val="3C3C3C"/>
-                </a:solidFill>
-              </a:rPr>
-              <a:t>Runge's phenomenon causes wild oscillations near boundaries with equispaced nodes. Chebyshev clustering prevents this and gives exponential convergence.</a:t>
-            </a:r>
-          </a:p>
-          <a:p>
-            <a:pPr>
-              <a:spcBef>
-                <a:spcPts val="300"/>
-              </a:spcBef>
-              <a:spcAft>
-                <a:spcPts val="200"/>
-              </a:spcAft>
-            </a:pPr>
-            <a:r>
-              <a:rPr sz="500" b="0">
-                <a:solidFill>
-                  <a:srgbClr val="3C3C3C"/>
-                </a:solidFill>
-              </a:rPr>
-              <a:t/>
-            </a:r>
-          </a:p>
-          <a:p>
-            <a:pPr>
-              <a:spcBef>
-                <a:spcPts val="300"/>
-              </a:spcBef>
-              <a:spcAft>
-                <a:spcPts val="200"/>
-              </a:spcAft>
-            </a:pPr>
-            <a:r>
-              <a:rPr sz="1600" b="1">
-                <a:solidFill>
-                  <a:srgbClr val="1F4E79"/>
-                </a:solidFill>
-              </a:rPr>
-              <a:t>4.  Cost vs accuracy is a real tradeoff</a:t>
-            </a:r>
-          </a:p>
-          <a:p>
-            <a:pPr>
-              <a:spcBef>
-                <a:spcPts val="300"/>
-              </a:spcBef>
-              <a:spcAft>
-                <a:spcPts val="200"/>
-              </a:spcAft>
-            </a:pPr>
-            <a:r>
-              <a:rPr sz="1400" b="0">
-                <a:solidFill>
-                  <a:srgbClr val="3C3C3C"/>
-                </a:solidFill>
-              </a:rPr>
-              <a:t>More training nodes → lower surrogate error, but longer precomputation. The visualization quantifies exactly how steep that tradeoff is.</a:t>
-            </a:r>
-          </a:p>
-          <a:p>
-            <a:pPr>
-              <a:spcBef>
-                <a:spcPts val="300"/>
-              </a:spcBef>
-              <a:spcAft>
-                <a:spcPts val="200"/>
-              </a:spcAft>
-            </a:pPr>
-            <a:r>
-              <a:rPr sz="500" b="0">
-                <a:solidFill>
-                  <a:srgbClr val="3C3C3C"/>
-                </a:solidFill>
-              </a:rPr>
-              <a:t/>
-            </a:r>
-          </a:p>
-          <a:p>
-            <a:pPr>
-              <a:spcBef>
-                <a:spcPts val="300"/>
-              </a:spcBef>
-              <a:spcAft>
-                <a:spcPts val="200"/>
-              </a:spcAft>
-            </a:pPr>
-            <a:r>
-              <a:rPr sz="1600" b="1">
-                <a:solidFill>
-                  <a:srgbClr val="1F4E79"/>
-                </a:solidFill>
-              </a:rPr>
-              <a:t>5.  Linked views are more powerful than static plots</a:t>
-            </a:r>
-          </a:p>
-          <a:p>
-            <a:pPr>
-              <a:spcBef>
-                <a:spcPts val="300"/>
-              </a:spcBef>
-              <a:spcAft>
-                <a:spcPts val="200"/>
-              </a:spcAft>
-            </a:pPr>
-            <a:r>
-              <a:rPr sz="1400" b="0">
-                <a:solidFill>
-                  <a:srgbClr val="3C3C3C"/>
-                </a:solidFill>
-              </a:rPr>
-              <a:t>One slider updating phase portrait, time series, error, and cost simultaneously reveals connections that isolated charts hide.</a:t>
+              <a:t>One μ slider updating phase portrait, time series, error, and cost at once reveals connections that separate plots would hide.</a:t>
             </a:r>
           </a:p>
         </p:txBody>
@@ -4394,7 +4416,7 @@
         <p:spPr>
           <a:xfrm>
             <a:off x="0" y="0"/>
-            <a:ext cx="12188952" cy="1005840"/>
+            <a:ext cx="12188952" cy="1051560"/>
           </a:xfrm>
           <a:prstGeom prst="rect">
             <a:avLst/>
@@ -4436,8 +4458,8 @@
         </p:nvSpPr>
         <p:spPr>
           <a:xfrm>
-            <a:off x="228600" y="91440"/>
-            <a:ext cx="11704320" cy="777240"/>
+            <a:off x="274320" y="54864"/>
+            <a:ext cx="11640312" cy="640080"/>
           </a:xfrm>
           <a:prstGeom prst="rect">
             <a:avLst/>
@@ -4452,7 +4474,7 @@
           <a:p>
             <a:pPr algn="l"/>
             <a:r>
-              <a:rPr sz="3200" b="1">
+              <a:rPr sz="2800" b="1">
                 <a:solidFill>
                   <a:srgbClr val="FFFFFF"/>
                 </a:solidFill>
@@ -4471,7 +4493,7 @@
         <p:spPr>
           <a:xfrm>
             <a:off x="457200" y="1188720"/>
-            <a:ext cx="11247120" cy="5303520"/>
+            <a:ext cx="11247120" cy="5394960"/>
           </a:xfrm>
           <a:prstGeom prst="rect">
             <a:avLst/>
@@ -4486,10 +4508,56 @@
           <a:p>
             <a:pPr>
               <a:spcBef>
-                <a:spcPts val="300"/>
-              </a:spcBef>
-              <a:spcAft>
+                <a:spcPts val="600"/>
+              </a:spcBef>
+              <a:spcAft>
+                <a:spcPts val="0"/>
+              </a:spcAft>
+            </a:pPr>
+            <a:r>
+              <a:rPr sz="1800" b="1">
+                <a:solidFill>
+                  <a:srgbClr val="1F4E79"/>
+                </a:solidFill>
+              </a:rPr>
+              <a:t>What this project built</a:t>
+            </a:r>
+          </a:p>
+          <a:p>
+            <a:pPr>
+              <a:spcBef>
                 <a:spcPts val="200"/>
+              </a:spcBef>
+              <a:spcAft>
+                <a:spcPts val="0"/>
+              </a:spcAft>
+            </a:pPr>
+            <a:r>
+              <a:rPr sz="1500" b="0">
+                <a:solidFill>
+                  <a:srgbClr val="3C3C3C"/>
+                </a:solidFill>
+              </a:rPr>
+              <a:t>A seven-page interactive suite that takes the Van der Pol oscillator from first principles all the way to surrogate modeling, running entirely in the browser with no installation needed.</a:t>
+            </a:r>
+          </a:p>
+          <a:p>
+            <a:pPr>
+              <a:spcBef>
+                <a:spcPts val="1000"/>
+              </a:spcBef>
+              <a:spcAft>
+                <a:spcPts val="0"/>
+              </a:spcAft>
+            </a:pPr>
+          </a:p>
+          <a:p>
+            <a:pPr>
+              <a:spcBef>
+                <a:spcPts val="0"/>
+              </a:spcBef>
+              <a:spcAft>
+                <a:spcPts val="0"/>
               </a:spcAft>
             </a:pPr>
             <a:r>
@@ -4498,16 +4566,16 @@
                   <a:srgbClr val="1F4E79"/>
                 </a:solidFill>
               </a:rPr>
-              <a:t>What this project accomplished</a:t>
-            </a:r>
-          </a:p>
-          <a:p>
-            <a:pPr>
-              <a:spcBef>
-                <a:spcPts val="300"/>
-              </a:spcBef>
-              <a:spcAft>
+              <a:t>The main takeaway</a:t>
+            </a:r>
+          </a:p>
+          <a:p>
+            <a:pPr>
+              <a:spcBef>
                 <a:spcPts val="200"/>
+              </a:spcBef>
+              <a:spcAft>
+                <a:spcPts val="0"/>
               </a:spcAft>
             </a:pPr>
             <a:r>
@@ -4516,34 +4584,126 @@
                   <a:srgbClr val="3C3C3C"/>
                 </a:solidFill>
               </a:rPr>
-              <a:t>A seven-page interactive suite that teaches the Van der Pol oscillator from first principles to advanced surrogate modeling — entirely in the browser, no install required.</a:t>
-            </a:r>
-          </a:p>
-          <a:p>
-            <a:pPr>
-              <a:spcBef>
-                <a:spcPts val="300"/>
-              </a:spcBef>
-              <a:spcAft>
+              <a:t>You do not need calculus to build intuition for nonlinear dynamics. A good visualization makes parameter sensitivity, attractors, vector fields, and interpolation error click, even for someone seeing this for the first time.</a:t>
+            </a:r>
+          </a:p>
+          <a:p>
+            <a:pPr>
+              <a:spcBef>
+                <a:spcPts val="1000"/>
+              </a:spcBef>
+              <a:spcAft>
+                <a:spcPts val="0"/>
+              </a:spcAft>
+            </a:pPr>
+          </a:p>
+          <a:p>
+            <a:pPr>
+              <a:spcBef>
+                <a:spcPts val="0"/>
+              </a:spcBef>
+              <a:spcAft>
+                <a:spcPts val="0"/>
+              </a:spcAft>
+            </a:pPr>
+            <a:r>
+              <a:rPr sz="1800" b="1">
+                <a:solidFill>
+                  <a:srgbClr val="1F4E79"/>
+                </a:solidFill>
+              </a:rPr>
+              <a:t>Things that worked well</a:t>
+            </a:r>
+          </a:p>
+          <a:p>
+            <a:pPr>
+              <a:spcBef>
                 <a:spcPts val="200"/>
-              </a:spcAft>
-            </a:pPr>
-            <a:r>
-              <a:rPr sz="700" b="0">
+              </a:spcBef>
+              <a:spcAft>
+                <a:spcPts val="0"/>
+              </a:spcAft>
+            </a:pPr>
+            <a:r>
+              <a:rPr sz="1400" b="0">
                 <a:solidFill>
                   <a:srgbClr val="3C3C3C"/>
                 </a:solidFill>
               </a:rPr>
-              <a:t/>
-            </a:r>
-          </a:p>
-          <a:p>
-            <a:pPr>
-              <a:spcBef>
-                <a:spcPts val="300"/>
-              </a:spcBef>
-              <a:spcAft>
+              <a:t>Linked views beat isolated charts. The μ slider connects all seven pages.</a:t>
+            </a:r>
+          </a:p>
+          <a:p>
+            <a:pPr>
+              <a:spcBef>
                 <a:spcPts val="200"/>
+              </a:spcBef>
+              <a:spcAft>
+                <a:spcPts val="0"/>
+              </a:spcAft>
+            </a:pPr>
+            <a:r>
+              <a:rPr sz="1400" b="0">
+                <a:solidFill>
+                  <a:srgbClr val="3C3C3C"/>
+                </a:solidFill>
+              </a:rPr>
+              <a:t>Animation shows time structure that a static plot cannot (see Basin of Attraction).</a:t>
+            </a:r>
+          </a:p>
+          <a:p>
+            <a:pPr>
+              <a:spcBef>
+                <a:spcPts val="200"/>
+              </a:spcBef>
+              <a:spcAft>
+                <a:spcPts val="0"/>
+              </a:spcAft>
+            </a:pPr>
+            <a:r>
+              <a:rPr sz="1400" b="0">
+                <a:solidFill>
+                  <a:srgbClr val="3C3C3C"/>
+                </a:solidFill>
+              </a:rPr>
+              <a:t>Plasma color scale works well for a continuous parameter like μ.</a:t>
+            </a:r>
+          </a:p>
+          <a:p>
+            <a:pPr>
+              <a:spcBef>
+                <a:spcPts val="200"/>
+              </a:spcBef>
+              <a:spcAft>
+                <a:spcPts val="0"/>
+              </a:spcAft>
+            </a:pPr>
+            <a:r>
+              <a:rPr sz="1400" b="0">
+                <a:solidFill>
+                  <a:srgbClr val="3C3C3C"/>
+                </a:solidFill>
+              </a:rPr>
+              <a:t>Log-scale error axes are necessary. Linear scale makes all differences look the same.</a:t>
+            </a:r>
+          </a:p>
+          <a:p>
+            <a:pPr>
+              <a:spcBef>
+                <a:spcPts val="1000"/>
+              </a:spcBef>
+              <a:spcAft>
+                <a:spcPts val="0"/>
+              </a:spcAft>
+            </a:pPr>
+          </a:p>
+          <a:p>
+            <a:pPr>
+              <a:spcBef>
+                <a:spcPts val="0"/>
+              </a:spcBef>
+              <a:spcAft>
+                <a:spcPts val="0"/>
               </a:spcAft>
             </a:pPr>
             <a:r>
@@ -4552,187 +4712,25 @@
                   <a:srgbClr val="1F4E79"/>
                 </a:solidFill>
               </a:rPr>
-              <a:t>The core insight in plain English</a:t>
-            </a:r>
-          </a:p>
-          <a:p>
-            <a:pPr>
-              <a:spcBef>
-                <a:spcPts val="300"/>
-              </a:spcBef>
-              <a:spcAft>
+              <a:t>vs other tools</a:t>
+            </a:r>
+          </a:p>
+          <a:p>
+            <a:pPr>
+              <a:spcBef>
                 <a:spcPts val="200"/>
-              </a:spcAft>
-            </a:pPr>
-            <a:r>
-              <a:rPr sz="1500" b="0">
+              </a:spcBef>
+              <a:spcAft>
+                <a:spcPts val="0"/>
+              </a:spcAft>
+            </a:pPr>
+            <a:r>
+              <a:rPr sz="1400" b="0">
                 <a:solidFill>
                   <a:srgbClr val="3C3C3C"/>
                 </a:solidFill>
               </a:rPr>
-              <a:t>Nonlinear dynamics don't need calculus to be understood. A well-designed visualization makes parameter sensitivity, attractors, vector fields, and interpolation error intuitively clear — even for first-time viewers.</a:t>
-            </a:r>
-          </a:p>
-          <a:p>
-            <a:pPr>
-              <a:spcBef>
-                <a:spcPts val="300"/>
-              </a:spcBef>
-              <a:spcAft>
-                <a:spcPts val="200"/>
-              </a:spcAft>
-            </a:pPr>
-            <a:r>
-              <a:rPr sz="700" b="0">
-                <a:solidFill>
-                  <a:srgbClr val="3C3C3C"/>
-                </a:solidFill>
-              </a:rPr>
-              <a:t/>
-            </a:r>
-          </a:p>
-          <a:p>
-            <a:pPr>
-              <a:spcBef>
-                <a:spcPts val="300"/>
-              </a:spcBef>
-              <a:spcAft>
-                <a:spcPts val="200"/>
-              </a:spcAft>
-            </a:pPr>
-            <a:r>
-              <a:rPr sz="1800" b="1">
-                <a:solidFill>
-                  <a:srgbClr val="1F4E79"/>
-                </a:solidFill>
-              </a:rPr>
-              <a:t>Design lessons learned</a:t>
-            </a:r>
-          </a:p>
-          <a:p>
-            <a:pPr>
-              <a:spcBef>
-                <a:spcPts val="300"/>
-              </a:spcBef>
-              <a:spcAft>
-                <a:spcPts val="200"/>
-              </a:spcAft>
-            </a:pPr>
-            <a:r>
-              <a:rPr sz="1400" b="0">
-                <a:solidFill>
-                  <a:srgbClr val="3C3C3C"/>
-                </a:solidFill>
-              </a:rPr>
-              <a:t>Linked views &gt; isolated charts — the μ slider threads through all seven pages.</a:t>
-            </a:r>
-          </a:p>
-          <a:p>
-            <a:pPr>
-              <a:spcBef>
-                <a:spcPts val="300"/>
-              </a:spcBef>
-              <a:spcAft>
-                <a:spcPts val="200"/>
-              </a:spcAft>
-            </a:pPr>
-            <a:r>
-              <a:rPr sz="1400" b="0">
-                <a:solidFill>
-                  <a:srgbClr val="3C3C3C"/>
-                </a:solidFill>
-              </a:rPr>
-              <a:t>Animation reveals time structure that static plots hide (Basin of Attraction).</a:t>
-            </a:r>
-          </a:p>
-          <a:p>
-            <a:pPr>
-              <a:spcBef>
-                <a:spcPts val="300"/>
-              </a:spcBef>
-              <a:spcAft>
-                <a:spcPts val="200"/>
-              </a:spcAft>
-            </a:pPr>
-            <a:r>
-              <a:rPr sz="1400" b="0">
-                <a:solidFill>
-                  <a:srgbClr val="3C3C3C"/>
-                </a:solidFill>
-              </a:rPr>
-              <a:t>Plasma color encoding is perceptually uniform — great for a continuous parameter.</a:t>
-            </a:r>
-          </a:p>
-          <a:p>
-            <a:pPr>
-              <a:spcBef>
-                <a:spcPts val="300"/>
-              </a:spcBef>
-              <a:spcAft>
-                <a:spcPts val="200"/>
-              </a:spcAft>
-            </a:pPr>
-            <a:r>
-              <a:rPr sz="1400" b="0">
-                <a:solidFill>
-                  <a:srgbClr val="3C3C3C"/>
-                </a:solidFill>
-              </a:rPr>
-              <a:t>Log-scale error axes are essential; linear scale collapses all differences to noise.</a:t>
-            </a:r>
-          </a:p>
-          <a:p>
-            <a:pPr>
-              <a:spcBef>
-                <a:spcPts val="300"/>
-              </a:spcBef>
-              <a:spcAft>
-                <a:spcPts val="200"/>
-              </a:spcAft>
-            </a:pPr>
-            <a:r>
-              <a:rPr sz="700" b="0">
-                <a:solidFill>
-                  <a:srgbClr val="3C3C3C"/>
-                </a:solidFill>
-              </a:rPr>
-              <a:t/>
-            </a:r>
-          </a:p>
-          <a:p>
-            <a:pPr>
-              <a:spcBef>
-                <a:spcPts val="300"/>
-              </a:spcBef>
-              <a:spcAft>
-                <a:spcPts val="200"/>
-              </a:spcAft>
-            </a:pPr>
-            <a:r>
-              <a:rPr sz="1800" b="1">
-                <a:solidFill>
-                  <a:srgbClr val="1F4E79"/>
-                </a:solidFill>
-              </a:rPr>
-              <a:t>Comparison with alternatives</a:t>
-            </a:r>
-          </a:p>
-          <a:p>
-            <a:pPr>
-              <a:spcBef>
-                <a:spcPts val="300"/>
-              </a:spcBef>
-              <a:spcAft>
-                <a:spcPts val="200"/>
-              </a:spcAft>
-            </a:pPr>
-            <a:r>
-              <a:rPr sz="1400" b="0">
-                <a:solidFill>
-                  <a:srgbClr val="3C3C3C"/>
-                </a:solidFill>
-              </a:rPr>
-              <a:t>Wolfram / MATLAB: powerful but not browser-native or fully linked. This project trades raw speed for zero-install interactivity and pedagogical transparency.</a:t>
+              <a:t>Wolfram and MATLAB are more powerful numerically but need software and are not as easy to link across views. This project trades some speed for browser-native interactivity and clarity.</a:t>
             </a:r>
           </a:p>
         </p:txBody>
@@ -4764,7 +4762,7 @@
         <p:spPr>
           <a:xfrm>
             <a:off x="0" y="0"/>
-            <a:ext cx="12188952" cy="1005840"/>
+            <a:ext cx="12188952" cy="1051560"/>
           </a:xfrm>
           <a:prstGeom prst="rect">
             <a:avLst/>
@@ -4806,8 +4804,8 @@
         </p:nvSpPr>
         <p:spPr>
           <a:xfrm>
-            <a:off x="228600" y="91440"/>
-            <a:ext cx="11704320" cy="777240"/>
+            <a:off x="274320" y="54864"/>
+            <a:ext cx="11640312" cy="640080"/>
           </a:xfrm>
           <a:prstGeom prst="rect">
             <a:avLst/>
@@ -4822,7 +4820,7 @@
           <a:p>
             <a:pPr algn="l"/>
             <a:r>
-              <a:rPr sz="3200" b="1">
+              <a:rPr sz="2800" b="1">
                 <a:solidFill>
                   <a:srgbClr val="FFFFFF"/>
                 </a:solidFill>
@@ -4840,8 +4838,8 @@
         </p:nvSpPr>
         <p:spPr>
           <a:xfrm>
-            <a:off x="365760" y="1143000"/>
-            <a:ext cx="5669280" cy="5394960"/>
+            <a:off x="365760" y="1188720"/>
+            <a:ext cx="5623560" cy="5394960"/>
           </a:xfrm>
           <a:prstGeom prst="rect">
             <a:avLst/>
@@ -4856,10 +4854,56 @@
           <a:p>
             <a:pPr>
               <a:spcBef>
-                <a:spcPts val="300"/>
-              </a:spcBef>
-              <a:spcAft>
+                <a:spcPts val="600"/>
+              </a:spcBef>
+              <a:spcAft>
+                <a:spcPts val="0"/>
+              </a:spcAft>
+            </a:pPr>
+            <a:r>
+              <a:rPr sz="1700" b="1">
+                <a:solidFill>
+                  <a:srgbClr val="1F4E79"/>
+                </a:solidFill>
+              </a:rPr>
+              <a:t>Better Surrogate Models</a:t>
+            </a:r>
+          </a:p>
+          <a:p>
+            <a:pPr>
+              <a:spcBef>
                 <a:spcPts val="200"/>
+              </a:spcBef>
+              <a:spcAft>
+                <a:spcPts val="0"/>
+              </a:spcAft>
+            </a:pPr>
+            <a:r>
+              <a:rPr sz="1300" b="0">
+                <a:solidFill>
+                  <a:srgbClr val="3C3C3C"/>
+                </a:solidFill>
+              </a:rPr>
+              <a:t>Add cubic splines, RBF, and Gaussian Process surrogates. GPs give you uncertainty bands around predictions, not just point estimates.</a:t>
+            </a:r>
+          </a:p>
+          <a:p>
+            <a:pPr>
+              <a:spcBef>
+                <a:spcPts val="800"/>
+              </a:spcBef>
+              <a:spcAft>
+                <a:spcPts val="0"/>
+              </a:spcAft>
+            </a:pPr>
+          </a:p>
+          <a:p>
+            <a:pPr>
+              <a:spcBef>
+                <a:spcPts val="0"/>
+              </a:spcBef>
+              <a:spcAft>
+                <a:spcPts val="0"/>
               </a:spcAft>
             </a:pPr>
             <a:r>
@@ -4868,16 +4912,16 @@
                   <a:srgbClr val="1F4E79"/>
                 </a:solidFill>
               </a:rPr>
-              <a:t>Better Surrogate Models</a:t>
-            </a:r>
-          </a:p>
-          <a:p>
-            <a:pPr>
-              <a:spcBef>
-                <a:spcPts val="300"/>
-              </a:spcBef>
-              <a:spcAft>
+              <a:t>Adaptive Node Placement</a:t>
+            </a:r>
+          </a:p>
+          <a:p>
+            <a:pPr>
+              <a:spcBef>
                 <a:spcPts val="200"/>
+              </a:spcBef>
+              <a:spcAft>
+                <a:spcPts val="0"/>
               </a:spcAft>
             </a:pPr>
             <a:r>
@@ -4886,52 +4930,90 @@
                   <a:srgbClr val="3C3C3C"/>
                 </a:solidFill>
               </a:rPr>
-              <a:t>Add cubic splines, RBF, and Gaussian Process surrogates. GPs give uncertainty bands — confidence intervals around predictions.</a:t>
-            </a:r>
-          </a:p>
-          <a:p>
-            <a:pPr>
-              <a:spcBef>
-                <a:spcPts val="300"/>
-              </a:spcBef>
-              <a:spcAft>
+              <a:t>Automatically refine sampling near μ values where behavior changes fast. Could cut the number of ODE solves roughly in half.</a:t>
+            </a:r>
+          </a:p>
+          <a:p>
+            <a:pPr>
+              <a:spcBef>
+                <a:spcPts val="800"/>
+              </a:spcBef>
+              <a:spcAft>
+                <a:spcPts val="0"/>
+              </a:spcAft>
+            </a:pPr>
+          </a:p>
+          <a:p>
+            <a:pPr>
+              <a:spcBef>
+                <a:spcPts val="0"/>
+              </a:spcBef>
+              <a:spcAft>
+                <a:spcPts val="0"/>
+              </a:spcAft>
+            </a:pPr>
+            <a:r>
+              <a:rPr sz="1700" b="1">
+                <a:solidFill>
+                  <a:srgbClr val="1F4E79"/>
+                </a:solidFill>
+              </a:rPr>
+              <a:t>Stochastic Extension</a:t>
+            </a:r>
+          </a:p>
+          <a:p>
+            <a:pPr>
+              <a:spcBef>
                 <a:spcPts val="200"/>
-              </a:spcAft>
-            </a:pPr>
-            <a:r>
-              <a:rPr sz="500" b="0">
+              </a:spcBef>
+              <a:spcAft>
+                <a:spcPts val="0"/>
+              </a:spcAft>
+            </a:pPr>
+            <a:r>
+              <a:rPr sz="1300" b="0">
                 <a:solidFill>
                   <a:srgbClr val="3C3C3C"/>
                 </a:solidFill>
               </a:rPr>
-              <a:t/>
-            </a:r>
-          </a:p>
-          <a:p>
-            <a:pPr>
-              <a:spcBef>
-                <a:spcPts val="300"/>
-              </a:spcBef>
-              <a:spcAft>
+              <a:t>Add noise to the ODE. Show how clean limit cycles blur into probability clouds, which is what happens in real physical systems.</a:t>
+            </a:r>
+          </a:p>
+          <a:p>
+            <a:pPr>
+              <a:spcBef>
+                <a:spcPts val="800"/>
+              </a:spcBef>
+              <a:spcAft>
+                <a:spcPts val="0"/>
+              </a:spcAft>
+            </a:pPr>
+          </a:p>
+          <a:p>
+            <a:pPr>
+              <a:spcBef>
+                <a:spcPts val="0"/>
+              </a:spcBef>
+              <a:spcAft>
+                <a:spcPts val="0"/>
+              </a:spcAft>
+            </a:pPr>
+            <a:r>
+              <a:rPr sz="1700" b="1">
+                <a:solidFill>
+                  <a:srgbClr val="1F4E79"/>
+                </a:solidFill>
+              </a:rPr>
+              <a:t>Web Workers for Computation</a:t>
+            </a:r>
+          </a:p>
+          <a:p>
+            <a:pPr>
+              <a:spcBef>
                 <a:spcPts val="200"/>
-              </a:spcAft>
-            </a:pPr>
-            <a:r>
-              <a:rPr sz="1700" b="1">
-                <a:solidFill>
-                  <a:srgbClr val="1F4E79"/>
-                </a:solidFill>
-              </a:rPr>
-              <a:t>Adaptive Node Placement</a:t>
-            </a:r>
-          </a:p>
-          <a:p>
-            <a:pPr>
-              <a:spcBef>
-                <a:spcPts val="300"/>
-              </a:spcBef>
-              <a:spcAft>
-                <a:spcPts val="200"/>
+              </a:spcBef>
+              <a:spcAft>
+                <a:spcPts val="0"/>
               </a:spcAft>
             </a:pPr>
             <a:r>
@@ -4940,115 +5022,7 @@
                   <a:srgbClr val="3C3C3C"/>
                 </a:solidFill>
               </a:rPr>
-              <a:t>Auto-refine sampling near μ values where behavior changes fastest. Could halve the number of ODE solves needed.</a:t>
-            </a:r>
-          </a:p>
-          <a:p>
-            <a:pPr>
-              <a:spcBef>
-                <a:spcPts val="300"/>
-              </a:spcBef>
-              <a:spcAft>
-                <a:spcPts val="200"/>
-              </a:spcAft>
-            </a:pPr>
-            <a:r>
-              <a:rPr sz="500" b="0">
-                <a:solidFill>
-                  <a:srgbClr val="3C3C3C"/>
-                </a:solidFill>
-              </a:rPr>
-              <a:t/>
-            </a:r>
-          </a:p>
-          <a:p>
-            <a:pPr>
-              <a:spcBef>
-                <a:spcPts val="300"/>
-              </a:spcBef>
-              <a:spcAft>
-                <a:spcPts val="200"/>
-              </a:spcAft>
-            </a:pPr>
-            <a:r>
-              <a:rPr sz="1700" b="1">
-                <a:solidFill>
-                  <a:srgbClr val="1F4E79"/>
-                </a:solidFill>
-              </a:rPr>
-              <a:t>Stochastic Extension</a:t>
-            </a:r>
-          </a:p>
-          <a:p>
-            <a:pPr>
-              <a:spcBef>
-                <a:spcPts val="300"/>
-              </a:spcBef>
-              <a:spcAft>
-                <a:spcPts val="200"/>
-              </a:spcAft>
-            </a:pPr>
-            <a:r>
-              <a:rPr sz="1300" b="0">
-                <a:solidFill>
-                  <a:srgbClr val="3C3C3C"/>
-                </a:solidFill>
-              </a:rPr>
-              <a:t>Add noise to the ODE. Show how limit cycles fuzz into probability clouds — relevant for real noisy systems.</a:t>
-            </a:r>
-          </a:p>
-          <a:p>
-            <a:pPr>
-              <a:spcBef>
-                <a:spcPts val="300"/>
-              </a:spcBef>
-              <a:spcAft>
-                <a:spcPts val="200"/>
-              </a:spcAft>
-            </a:pPr>
-            <a:r>
-              <a:rPr sz="500" b="0">
-                <a:solidFill>
-                  <a:srgbClr val="3C3C3C"/>
-                </a:solidFill>
-              </a:rPr>
-              <a:t/>
-            </a:r>
-          </a:p>
-          <a:p>
-            <a:pPr>
-              <a:spcBef>
-                <a:spcPts val="300"/>
-              </a:spcBef>
-              <a:spcAft>
-                <a:spcPts val="200"/>
-              </a:spcAft>
-            </a:pPr>
-            <a:r>
-              <a:rPr sz="1700" b="1">
-                <a:solidFill>
-                  <a:srgbClr val="1F4E79"/>
-                </a:solidFill>
-              </a:rPr>
-              <a:t>Web Workers for Computation</a:t>
-            </a:r>
-          </a:p>
-          <a:p>
-            <a:pPr>
-              <a:spcBef>
-                <a:spcPts val="300"/>
-              </a:spcBef>
-              <a:spcAft>
-                <a:spcPts val="200"/>
-              </a:spcAft>
-            </a:pPr>
-            <a:r>
-              <a:rPr sz="1300" b="0">
-                <a:solidFill>
-                  <a:srgbClr val="3C3C3C"/>
-                </a:solidFill>
-              </a:rPr>
-              <a:t>Move ODE solving to background threads so the UI never freezes.</a:t>
+              <a:t>Move the ODE solving to a background thread so the UI stays responsive during heavy parameter sweeps.</a:t>
             </a:r>
           </a:p>
         </p:txBody>
@@ -5061,8 +5035,8 @@
         </p:nvSpPr>
         <p:spPr>
           <a:xfrm>
-            <a:off x="6309360" y="1143000"/>
-            <a:ext cx="5577840" cy="5394960"/>
+            <a:off x="6172200" y="1188720"/>
+            <a:ext cx="5715000" cy="5394960"/>
           </a:xfrm>
           <a:prstGeom prst="rect">
             <a:avLst/>
@@ -5077,10 +5051,56 @@
           <a:p>
             <a:pPr>
               <a:spcBef>
-                <a:spcPts val="300"/>
-              </a:spcBef>
-              <a:spcAft>
+                <a:spcPts val="600"/>
+              </a:spcBef>
+              <a:spcAft>
+                <a:spcPts val="0"/>
+              </a:spcAft>
+            </a:pPr>
+            <a:r>
+              <a:rPr sz="1700" b="1">
+                <a:solidFill>
+                  <a:srgbClr val="1F4E79"/>
+                </a:solidFill>
+              </a:rPr>
+              <a:t>Coupled Oscillators</a:t>
+            </a:r>
+          </a:p>
+          <a:p>
+            <a:pPr>
+              <a:spcBef>
                 <a:spcPts val="200"/>
+              </a:spcBef>
+              <a:spcAft>
+                <a:spcPts val="0"/>
+              </a:spcAft>
+            </a:pPr>
+            <a:r>
+              <a:rPr sz="1300" b="0">
+                <a:solidFill>
+                  <a:srgbClr val="3C3C3C"/>
+                </a:solidFill>
+              </a:rPr>
+              <a:t>Two coupled Van der Pol oscillators with separate μ knobs. Opens up synchronization and near-chaos, a much richer parameter space.</a:t>
+            </a:r>
+          </a:p>
+          <a:p>
+            <a:pPr>
+              <a:spcBef>
+                <a:spcPts val="800"/>
+              </a:spcBef>
+              <a:spcAft>
+                <a:spcPts val="0"/>
+              </a:spcAft>
+            </a:pPr>
+          </a:p>
+          <a:p>
+            <a:pPr>
+              <a:spcBef>
+                <a:spcPts val="0"/>
+              </a:spcBef>
+              <a:spcAft>
+                <a:spcPts val="0"/>
               </a:spcAft>
             </a:pPr>
             <a:r>
@@ -5089,16 +5109,16 @@
                   <a:srgbClr val="1F4E79"/>
                 </a:solidFill>
               </a:rPr>
-              <a:t>Higher-Dimensional Extension</a:t>
-            </a:r>
-          </a:p>
-          <a:p>
-            <a:pPr>
-              <a:spcBef>
-                <a:spcPts val="300"/>
-              </a:spcBef>
-              <a:spcAft>
+              <a:t>Data Export</a:t>
+            </a:r>
+          </a:p>
+          <a:p>
+            <a:pPr>
+              <a:spcBef>
                 <a:spcPts val="200"/>
+              </a:spcBef>
+              <a:spcAft>
+                <a:spcPts val="0"/>
               </a:spcAft>
             </a:pPr>
             <a:r>
@@ -5107,52 +5127,90 @@
                   <a:srgbClr val="3C3C3C"/>
                 </a:solidFill>
               </a:rPr>
-              <a:t>Coupled Van der Pol oscillators to visualize synchronization and chaos — a richer playground for parameter studies.</a:t>
-            </a:r>
-          </a:p>
-          <a:p>
-            <a:pPr>
-              <a:spcBef>
-                <a:spcPts val="300"/>
-              </a:spcBef>
-              <a:spcAft>
+              <a:t>Let users download trajectory data, surrogate parameters, and error tables as CSV or JSON to use in their own pipelines.</a:t>
+            </a:r>
+          </a:p>
+          <a:p>
+            <a:pPr>
+              <a:spcBef>
+                <a:spcPts val="800"/>
+              </a:spcBef>
+              <a:spcAft>
+                <a:spcPts val="0"/>
+              </a:spcAft>
+            </a:pPr>
+          </a:p>
+          <a:p>
+            <a:pPr>
+              <a:spcBef>
+                <a:spcPts val="0"/>
+              </a:spcBef>
+              <a:spcAft>
+                <a:spcPts val="0"/>
+              </a:spcAft>
+            </a:pPr>
+            <a:r>
+              <a:rPr sz="1700" b="1">
+                <a:solidFill>
+                  <a:srgbClr val="1F4E79"/>
+                </a:solidFill>
+              </a:rPr>
+              <a:t>Accessibility and Mobile</a:t>
+            </a:r>
+          </a:p>
+          <a:p>
+            <a:pPr>
+              <a:spcBef>
                 <a:spcPts val="200"/>
-              </a:spcAft>
-            </a:pPr>
-            <a:r>
-              <a:rPr sz="500" b="0">
+              </a:spcBef>
+              <a:spcAft>
+                <a:spcPts val="0"/>
+              </a:spcAft>
+            </a:pPr>
+            <a:r>
+              <a:rPr sz="1300" b="0">
                 <a:solidFill>
                   <a:srgbClr val="3C3C3C"/>
                 </a:solidFill>
               </a:rPr>
-              <a:t/>
-            </a:r>
-          </a:p>
-          <a:p>
-            <a:pPr>
-              <a:spcBef>
-                <a:spcPts val="300"/>
-              </a:spcBef>
-              <a:spcAft>
+              <a:t>Add ARIA labels, keyboard navigation, and responsive layouts so it works on tablets and with screen readers.</a:t>
+            </a:r>
+          </a:p>
+          <a:p>
+            <a:pPr>
+              <a:spcBef>
+                <a:spcPts val="800"/>
+              </a:spcBef>
+              <a:spcAft>
+                <a:spcPts val="0"/>
+              </a:spcAft>
+            </a:pPr>
+          </a:p>
+          <a:p>
+            <a:pPr>
+              <a:spcBef>
+                <a:spcPts val="0"/>
+              </a:spcBef>
+              <a:spcAft>
+                <a:spcPts val="0"/>
+              </a:spcAft>
+            </a:pPr>
+            <a:r>
+              <a:rPr sz="1700" b="1">
+                <a:solidFill>
+                  <a:srgbClr val="1F4E79"/>
+                </a:solidFill>
+              </a:rPr>
+              <a:t>Side-by-Side Comparison</a:t>
+            </a:r>
+          </a:p>
+          <a:p>
+            <a:pPr>
+              <a:spcBef>
                 <a:spcPts val="200"/>
-              </a:spcAft>
-            </a:pPr>
-            <a:r>
-              <a:rPr sz="1700" b="1">
-                <a:solidFill>
-                  <a:srgbClr val="1F4E79"/>
-                </a:solidFill>
-              </a:rPr>
-              <a:t>Downloadable Reports</a:t>
-            </a:r>
-          </a:p>
-          <a:p>
-            <a:pPr>
-              <a:spcBef>
-                <a:spcPts val="300"/>
-              </a:spcBef>
-              <a:spcAft>
-                <a:spcPts val="200"/>
+              </a:spcBef>
+              <a:spcAft>
+                <a:spcPts val="0"/>
               </a:spcAft>
             </a:pPr>
             <a:r>
@@ -5161,115 +5219,7 @@
                   <a:srgbClr val="3C3C3C"/>
                 </a:solidFill>
               </a:rPr>
-              <a:t>Export trajectory data, surrogate parameters, and error tables as CSV/JSON for use in external pipelines.</a:t>
-            </a:r>
-          </a:p>
-          <a:p>
-            <a:pPr>
-              <a:spcBef>
-                <a:spcPts val="300"/>
-              </a:spcBef>
-              <a:spcAft>
-                <a:spcPts val="200"/>
-              </a:spcAft>
-            </a:pPr>
-            <a:r>
-              <a:rPr sz="500" b="0">
-                <a:solidFill>
-                  <a:srgbClr val="3C3C3C"/>
-                </a:solidFill>
-              </a:rPr>
-              <a:t/>
-            </a:r>
-          </a:p>
-          <a:p>
-            <a:pPr>
-              <a:spcBef>
-                <a:spcPts val="300"/>
-              </a:spcBef>
-              <a:spcAft>
-                <a:spcPts val="200"/>
-              </a:spcAft>
-            </a:pPr>
-            <a:r>
-              <a:rPr sz="1700" b="1">
-                <a:solidFill>
-                  <a:srgbClr val="1F4E79"/>
-                </a:solidFill>
-              </a:rPr>
-              <a:t>Accessibility &amp; Mobile</a:t>
-            </a:r>
-          </a:p>
-          <a:p>
-            <a:pPr>
-              <a:spcBef>
-                <a:spcPts val="300"/>
-              </a:spcBef>
-              <a:spcAft>
-                <a:spcPts val="200"/>
-              </a:spcAft>
-            </a:pPr>
-            <a:r>
-              <a:rPr sz="1300" b="0">
-                <a:solidFill>
-                  <a:srgbClr val="3C3C3C"/>
-                </a:solidFill>
-              </a:rPr>
-              <a:t>Add ARIA labels, keyboard navigation, and responsive layouts for tablets and screen-reader users.</a:t>
-            </a:r>
-          </a:p>
-          <a:p>
-            <a:pPr>
-              <a:spcBef>
-                <a:spcPts val="300"/>
-              </a:spcBef>
-              <a:spcAft>
-                <a:spcPts val="200"/>
-              </a:spcAft>
-            </a:pPr>
-            <a:r>
-              <a:rPr sz="500" b="0">
-                <a:solidFill>
-                  <a:srgbClr val="3C3C3C"/>
-                </a:solidFill>
-              </a:rPr>
-              <a:t/>
-            </a:r>
-          </a:p>
-          <a:p>
-            <a:pPr>
-              <a:spcBef>
-                <a:spcPts val="300"/>
-              </a:spcBef>
-              <a:spcAft>
-                <a:spcPts val="200"/>
-              </a:spcAft>
-            </a:pPr>
-            <a:r>
-              <a:rPr sz="1700" b="1">
-                <a:solidFill>
-                  <a:srgbClr val="1F4E79"/>
-                </a:solidFill>
-              </a:rPr>
-              <a:t>Side-by-Side Comparison Mode</a:t>
-            </a:r>
-          </a:p>
-          <a:p>
-            <a:pPr>
-              <a:spcBef>
-                <a:spcPts val="300"/>
-              </a:spcBef>
-              <a:spcAft>
-                <a:spcPts val="200"/>
-              </a:spcAft>
-            </a:pPr>
-            <a:r>
-              <a:rPr sz="1300" b="0">
-                <a:solidFill>
-                  <a:srgbClr val="3C3C3C"/>
-                </a:solidFill>
-              </a:rPr>
-              <a:t>Lock two μ values simultaneously to directly compare phase portraits without toggling back and forth.</a:t>
+              <a:t>Lock two μ values at once so you can compare phase portraits and metrics directly without toggling back and forth.</a:t>
             </a:r>
           </a:p>
         </p:txBody>
@@ -5301,7 +5251,7 @@
         <p:spPr>
           <a:xfrm>
             <a:off x="0" y="0"/>
-            <a:ext cx="12188952" cy="1005840"/>
+            <a:ext cx="12188952" cy="1051560"/>
           </a:xfrm>
           <a:prstGeom prst="rect">
             <a:avLst/>
@@ -5343,8 +5293,8 @@
         </p:nvSpPr>
         <p:spPr>
           <a:xfrm>
-            <a:off x="228600" y="91440"/>
-            <a:ext cx="11704320" cy="777240"/>
+            <a:off x="274320" y="54864"/>
+            <a:ext cx="11640312" cy="640080"/>
           </a:xfrm>
           <a:prstGeom prst="rect">
             <a:avLst/>
@@ -5359,12 +5309,12 @@
           <a:p>
             <a:pPr algn="l"/>
             <a:r>
-              <a:rPr sz="3000" b="1">
+              <a:rPr sz="2800" b="1">
                 <a:solidFill>
                   <a:srgbClr val="FFFFFF"/>
                 </a:solidFill>
               </a:rPr>
-              <a:t>What Is the Van der Pol Oscillator? (Plain English)</a:t>
+              <a:t>What Is the Van der Pol Oscillator?</a:t>
             </a:r>
           </a:p>
         </p:txBody>
@@ -5393,199 +5343,183 @@
           <a:p>
             <a:pPr>
               <a:spcBef>
-                <a:spcPts val="300"/>
-              </a:spcBef>
-              <a:spcAft>
+                <a:spcPts val="400"/>
+              </a:spcBef>
+              <a:spcAft>
+                <a:spcPts val="0"/>
+              </a:spcAft>
+            </a:pPr>
+            <a:r>
+              <a:rPr sz="1800" b="1">
+                <a:solidFill>
+                  <a:srgbClr val="1F4E79"/>
+                </a:solidFill>
+              </a:rPr>
+              <a:t>Think of a swing that keeps swinging forever on its own.</a:t>
+            </a:r>
+          </a:p>
+          <a:p>
+            <a:pPr>
+              <a:spcBef>
                 <a:spcPts val="200"/>
+              </a:spcBef>
+              <a:spcAft>
+                <a:spcPts val="0"/>
+              </a:spcAft>
+            </a:pPr>
+            <a:r>
+              <a:rPr sz="1500" b="0">
+                <a:solidFill>
+                  <a:srgbClr val="3C3C3C"/>
+                </a:solidFill>
+              </a:rPr>
+              <a:t>Normal swings slow down from friction or fly off with too much push. The Van der Pol oscillator finds a perfect middle ground: a self-sustaining rhythm called a limit cycle.</a:t>
+            </a:r>
+          </a:p>
+          <a:p>
+            <a:pPr>
+              <a:spcBef>
+                <a:spcPts val="1000"/>
+              </a:spcBef>
+              <a:spcAft>
+                <a:spcPts val="0"/>
+              </a:spcAft>
+            </a:pPr>
+          </a:p>
+          <a:p>
+            <a:pPr>
+              <a:spcBef>
+                <a:spcPts val="0"/>
+              </a:spcBef>
+              <a:spcAft>
+                <a:spcPts val="0"/>
               </a:spcAft>
             </a:pPr>
             <a:r>
               <a:rPr sz="1800" b="1">
                 <a:solidFill>
+                  <a:srgbClr val="C55A11"/>
+                </a:solidFill>
+              </a:rPr>
+              <a:t>The magic knob: mu (μ)</a:t>
+            </a:r>
+          </a:p>
+          <a:p>
+            <a:pPr>
+              <a:spcBef>
+                <a:spcPts val="200"/>
+              </a:spcBef>
+              <a:spcAft>
+                <a:spcPts val="0"/>
+              </a:spcAft>
+            </a:pPr>
+            <a:r>
+              <a:rPr sz="1400" b="0">
+                <a:solidFill>
+                  <a:srgbClr val="3C3C3C"/>
+                </a:solidFill>
+              </a:rPr>
+              <a:t>Small μ: smooth, round waves (like a gentle pendulum).</a:t>
+            </a:r>
+          </a:p>
+          <a:p>
+            <a:pPr>
+              <a:spcBef>
+                <a:spcPts val="200"/>
+              </a:spcBef>
+              <a:spcAft>
+                <a:spcPts val="0"/>
+              </a:spcAft>
+            </a:pPr>
+            <a:r>
+              <a:rPr sz="1400" b="0">
+                <a:solidFill>
+                  <a:srgbClr val="3C3C3C"/>
+                </a:solidFill>
+              </a:rPr>
+              <a:t>Large μ: slow charge-up then a hard snap-back (like a heartbeat).</a:t>
+            </a:r>
+          </a:p>
+          <a:p>
+            <a:pPr>
+              <a:spcBef>
+                <a:spcPts val="1000"/>
+              </a:spcBef>
+              <a:spcAft>
+                <a:spcPts val="0"/>
+              </a:spcAft>
+            </a:pPr>
+          </a:p>
+          <a:p>
+            <a:pPr>
+              <a:spcBef>
+                <a:spcPts val="0"/>
+              </a:spcBef>
+              <a:spcAft>
+                <a:spcPts val="0"/>
+              </a:spcAft>
+            </a:pPr>
+            <a:r>
+              <a:rPr sz="1600" b="1">
+                <a:solidFill>
                   <a:srgbClr val="1F4E79"/>
                 </a:solidFill>
               </a:rPr>
-              <a:t>Think of a swing that keeps swinging forever on its own.</a:t>
-            </a:r>
-          </a:p>
-          <a:p>
-            <a:pPr>
-              <a:spcBef>
-                <a:spcPts val="300"/>
-              </a:spcBef>
-              <a:spcAft>
+              <a:t>The equation, in plain English:</a:t>
+            </a:r>
+          </a:p>
+          <a:p>
+            <a:pPr>
+              <a:spcBef>
+                <a:spcPts val="400"/>
+              </a:spcBef>
+              <a:spcAft>
+                <a:spcPts val="0"/>
+              </a:spcAft>
+            </a:pPr>
+            <a:r>
+              <a:rPr sz="2200" b="1">
+                <a:solidFill>
+                  <a:srgbClr val="123460"/>
+                </a:solidFill>
+              </a:rPr>
+              <a:t>ẍ − μ(1 − x²)ẋ + x = 0</a:t>
+            </a:r>
+          </a:p>
+          <a:p>
+            <a:pPr>
+              <a:spcBef>
                 <a:spcPts val="200"/>
-              </a:spcAft>
-            </a:pPr>
-            <a:r>
-              <a:rPr sz="1500" b="0">
+              </a:spcBef>
+              <a:spcAft>
+                <a:spcPts val="0"/>
+              </a:spcAft>
+            </a:pPr>
+            <a:r>
+              <a:rPr sz="1300" b="0">
                 <a:solidFill>
                   <a:srgbClr val="3C3C3C"/>
                 </a:solidFill>
               </a:rPr>
-              <a:t>Normal swings slow down (too much friction) or fly off (too much push). The Van der Pol oscillator finds a perfect middle ground — a self-sustaining rhythm called a limit cycle.</a:t>
-            </a:r>
-          </a:p>
-          <a:p>
-            <a:pPr>
-              <a:spcBef>
-                <a:spcPts val="300"/>
-              </a:spcBef>
-              <a:spcAft>
-                <a:spcPts val="200"/>
-              </a:spcAft>
-            </a:pPr>
-            <a:r>
-              <a:rPr sz="800" b="0">
+              <a:t>x = position   |   ẋ = speed   |   ẍ = acceleration   |   μ = nonlinearity strength</a:t>
+            </a:r>
+          </a:p>
+          <a:p>
+            <a:pPr>
+              <a:spcBef>
+                <a:spcPts val="400"/>
+              </a:spcBef>
+              <a:spcAft>
+                <a:spcPts val="0"/>
+              </a:spcAft>
+            </a:pPr>
+            <a:r>
+              <a:rPr sz="1400" b="0">
                 <a:solidFill>
                   <a:srgbClr val="3C3C3C"/>
                 </a:solidFill>
               </a:rPr>
-              <a:t/>
-            </a:r>
-          </a:p>
-          <a:p>
-            <a:pPr>
-              <a:spcBef>
-                <a:spcPts val="300"/>
-              </a:spcBef>
-              <a:spcAft>
-                <a:spcPts val="200"/>
-              </a:spcAft>
-            </a:pPr>
-            <a:r>
-              <a:rPr sz="1800" b="1">
-                <a:solidFill>
-                  <a:srgbClr val="C55A11"/>
-                </a:solidFill>
-              </a:rPr>
-              <a:t>The magic knob: μ (mu)</a:t>
-            </a:r>
-          </a:p>
-          <a:p>
-            <a:pPr>
-              <a:spcBef>
-                <a:spcPts val="300"/>
-              </a:spcBef>
-              <a:spcAft>
-                <a:spcPts val="200"/>
-              </a:spcAft>
-            </a:pPr>
-            <a:r>
-              <a:rPr sz="1400" b="0">
-                <a:solidFill>
-                  <a:srgbClr val="3C3C3C"/>
-                </a:solidFill>
-              </a:rPr>
-              <a:t>Small μ → smooth, round waves  (like a gentle pendulum).</a:t>
-            </a:r>
-          </a:p>
-          <a:p>
-            <a:pPr>
-              <a:spcBef>
-                <a:spcPts val="300"/>
-              </a:spcBef>
-              <a:spcAft>
-                <a:spcPts val="200"/>
-              </a:spcAft>
-            </a:pPr>
-            <a:r>
-              <a:rPr sz="1400" b="0">
-                <a:solidFill>
-                  <a:srgbClr val="3C3C3C"/>
-                </a:solidFill>
-              </a:rPr>
-              <a:t>Large μ → slow charge-up then a hard snap-back  (like a heartbeat).</a:t>
-            </a:r>
-          </a:p>
-          <a:p>
-            <a:pPr>
-              <a:spcBef>
-                <a:spcPts val="300"/>
-              </a:spcBef>
-              <a:spcAft>
-                <a:spcPts val="200"/>
-              </a:spcAft>
-            </a:pPr>
-            <a:r>
-              <a:rPr sz="800" b="0">
-                <a:solidFill>
-                  <a:srgbClr val="3C3C3C"/>
-                </a:solidFill>
-              </a:rPr>
-              <a:t/>
-            </a:r>
-          </a:p>
-          <a:p>
-            <a:pPr>
-              <a:spcBef>
-                <a:spcPts val="300"/>
-              </a:spcBef>
-              <a:spcAft>
-                <a:spcPts val="200"/>
-              </a:spcAft>
-            </a:pPr>
-            <a:r>
-              <a:rPr sz="1600" b="1">
-                <a:solidFill>
-                  <a:srgbClr val="1F4E79"/>
-                </a:solidFill>
-              </a:rPr>
-              <a:t>The equation (plain-English version):</a:t>
-            </a:r>
-          </a:p>
-          <a:p>
-            <a:pPr>
-              <a:spcBef>
-                <a:spcPts val="300"/>
-              </a:spcBef>
-              <a:spcAft>
-                <a:spcPts val="200"/>
-              </a:spcAft>
-            </a:pPr>
-            <a:r>
-              <a:rPr sz="2000" b="1">
-                <a:solidFill>
-                  <a:srgbClr val="123460"/>
-                </a:solidFill>
-              </a:rPr>
-              <a:t>ẍ − μ(1 − x²)ẋ + x = 0</a:t>
-            </a:r>
-          </a:p>
-          <a:p>
-            <a:pPr>
-              <a:spcBef>
-                <a:spcPts val="300"/>
-              </a:spcBef>
-              <a:spcAft>
-                <a:spcPts val="200"/>
-              </a:spcAft>
-            </a:pPr>
-            <a:r>
-              <a:rPr sz="1300" b="0">
-                <a:solidFill>
-                  <a:srgbClr val="3C3C3C"/>
-                </a:solidFill>
-              </a:rPr>
-              <a:t>x = position   |   ẋ = speed   |   ẍ = acceleration   |   μ = nonlinearity</a:t>
-            </a:r>
-          </a:p>
-          <a:p>
-            <a:pPr>
-              <a:spcBef>
-                <a:spcPts val="300"/>
-              </a:spcBef>
-              <a:spcAft>
-                <a:spcPts val="200"/>
-              </a:spcAft>
-            </a:pPr>
-            <a:r>
-              <a:rPr sz="1400" b="0">
-                <a:solidFill>
-                  <a:srgbClr val="3C3C3C"/>
-                </a:solidFill>
-              </a:rPr>
-              <a:t>When |x| &lt; 1 → the middle term pumps energy in.  When |x| &gt; 1 → it takes energy out.  Result: the system locks onto a stable loop.</a:t>
+              <a:t>When |x| &lt; 1: the middle term pumps energy in. When |x| &gt; 1: it pulls energy out. The result is that the system locks onto a stable loop on its own.</a:t>
             </a:r>
           </a:p>
         </p:txBody>
@@ -5617,7 +5551,7 @@
         <p:spPr>
           <a:xfrm>
             <a:off x="0" y="0"/>
-            <a:ext cx="12188952" cy="1005840"/>
+            <a:ext cx="12188952" cy="1051560"/>
           </a:xfrm>
           <a:prstGeom prst="rect">
             <a:avLst/>
@@ -5659,8 +5593,8 @@
         </p:nvSpPr>
         <p:spPr>
           <a:xfrm>
-            <a:off x="228600" y="91440"/>
-            <a:ext cx="11704320" cy="777240"/>
+            <a:off x="274320" y="54864"/>
+            <a:ext cx="11640312" cy="640080"/>
           </a:xfrm>
           <a:prstGeom prst="rect">
             <a:avLst/>
@@ -5675,7 +5609,7 @@
           <a:p>
             <a:pPr algn="l"/>
             <a:r>
-              <a:rPr sz="3000" b="1">
+              <a:rPr sz="2800" b="1">
                 <a:solidFill>
                   <a:srgbClr val="FFFFFF"/>
                 </a:solidFill>
@@ -5693,7 +5627,7 @@
         </p:nvSpPr>
         <p:spPr>
           <a:xfrm>
-            <a:off x="365760" y="1143000"/>
+            <a:off x="365760" y="1188720"/>
             <a:ext cx="5669280" cy="5394960"/>
           </a:xfrm>
           <a:prstGeom prst="rect">
@@ -5709,10 +5643,110 @@
           <a:p>
             <a:pPr>
               <a:spcBef>
-                <a:spcPts val="300"/>
-              </a:spcBef>
-              <a:spcAft>
+                <a:spcPts val="400"/>
+              </a:spcBef>
+              <a:spcAft>
+                <a:spcPts val="0"/>
+              </a:spcAft>
+            </a:pPr>
+            <a:r>
+              <a:rPr sz="1700" b="1">
+                <a:solidFill>
+                  <a:srgbClr val="1F4E79"/>
+                </a:solidFill>
+              </a:rPr>
+              <a:t>Science and Engineering</a:t>
+            </a:r>
+          </a:p>
+          <a:p>
+            <a:pPr>
+              <a:spcBef>
                 <a:spcPts val="200"/>
+              </a:spcBef>
+              <a:spcAft>
+                <a:spcPts val="0"/>
+              </a:spcAft>
+            </a:pPr>
+            <a:r>
+              <a:rPr sz="1400" b="0">
+                <a:solidFill>
+                  <a:srgbClr val="3C3C3C"/>
+                </a:solidFill>
+              </a:rPr>
+              <a:t>Cardiac rhythms: the heart self-oscillates just like this model</a:t>
+            </a:r>
+          </a:p>
+          <a:p>
+            <a:pPr>
+              <a:spcBef>
+                <a:spcPts val="200"/>
+              </a:spcBef>
+              <a:spcAft>
+                <a:spcPts val="0"/>
+              </a:spcAft>
+            </a:pPr>
+            <a:r>
+              <a:rPr sz="1400" b="0">
+                <a:solidFill>
+                  <a:srgbClr val="3C3C3C"/>
+                </a:solidFill>
+              </a:rPr>
+              <a:t>Neuroscience: neuron firing patterns match Van der Pol dynamics</a:t>
+            </a:r>
+          </a:p>
+          <a:p>
+            <a:pPr>
+              <a:spcBef>
+                <a:spcPts val="200"/>
+              </a:spcBef>
+              <a:spcAft>
+                <a:spcPts val="0"/>
+              </a:spcAft>
+            </a:pPr>
+            <a:r>
+              <a:rPr sz="1400" b="0">
+                <a:solidFill>
+                  <a:srgbClr val="3C3C3C"/>
+                </a:solidFill>
+              </a:rPr>
+              <a:t>Electrical circuits: invented to describe vacuum-tube radio oscillators</a:t>
+            </a:r>
+          </a:p>
+          <a:p>
+            <a:pPr>
+              <a:spcBef>
+                <a:spcPts val="200"/>
+              </a:spcBef>
+              <a:spcAft>
+                <a:spcPts val="0"/>
+              </a:spcAft>
+            </a:pPr>
+            <a:r>
+              <a:rPr sz="1400" b="0">
+                <a:solidFill>
+                  <a:srgbClr val="3C3C3C"/>
+                </a:solidFill>
+              </a:rPr>
+              <a:t>Mechanical systems: vibration isolation, MEMS devices</a:t>
+            </a:r>
+          </a:p>
+          <a:p>
+            <a:pPr>
+              <a:spcBef>
+                <a:spcPts val="800"/>
+              </a:spcBef>
+              <a:spcAft>
+                <a:spcPts val="0"/>
+              </a:spcAft>
+            </a:pPr>
+          </a:p>
+          <a:p>
+            <a:pPr>
+              <a:spcBef>
+                <a:spcPts val="0"/>
+              </a:spcBef>
+              <a:spcAft>
+                <a:spcPts val="0"/>
               </a:spcAft>
             </a:pPr>
             <a:r>
@@ -5721,16 +5755,16 @@
                   <a:srgbClr val="1F4E79"/>
                 </a:solidFill>
               </a:rPr>
-              <a:t>Science &amp; Engineering</a:t>
-            </a:r>
-          </a:p>
-          <a:p>
-            <a:pPr>
-              <a:spcBef>
-                <a:spcPts val="300"/>
-              </a:spcBef>
-              <a:spcAft>
+              <a:t>Climate and Economics</a:t>
+            </a:r>
+          </a:p>
+          <a:p>
+            <a:pPr>
+              <a:spcBef>
                 <a:spcPts val="200"/>
+              </a:spcBef>
+              <a:spcAft>
+                <a:spcPts val="0"/>
               </a:spcAft>
             </a:pPr>
             <a:r>
@@ -5739,16 +5773,16 @@
                   <a:srgbClr val="3C3C3C"/>
                 </a:solidFill>
               </a:rPr>
-              <a:t>Cardiac rhythms — heart self-oscillates just like this model</a:t>
-            </a:r>
-          </a:p>
-          <a:p>
-            <a:pPr>
-              <a:spcBef>
-                <a:spcPts val="300"/>
-              </a:spcBef>
-              <a:spcAft>
+              <a:t>El Nino oscillations follow a similar nonlinear ODE structure</a:t>
+            </a:r>
+          </a:p>
+          <a:p>
+            <a:pPr>
+              <a:spcBef>
                 <a:spcPts val="200"/>
+              </a:spcBef>
+              <a:spcAft>
+                <a:spcPts val="0"/>
               </a:spcAft>
             </a:pPr>
             <a:r>
@@ -5757,115 +5791,7 @@
                   <a:srgbClr val="3C3C3C"/>
                 </a:solidFill>
               </a:rPr>
-              <a:t>Neuroscience — neuron firing patterns match Van der Pol</a:t>
-            </a:r>
-          </a:p>
-          <a:p>
-            <a:pPr>
-              <a:spcBef>
-                <a:spcPts val="300"/>
-              </a:spcBef>
-              <a:spcAft>
-                <a:spcPts val="200"/>
-              </a:spcAft>
-            </a:pPr>
-            <a:r>
-              <a:rPr sz="1400" b="0">
-                <a:solidFill>
-                  <a:srgbClr val="3C3C3C"/>
-                </a:solidFill>
-              </a:rPr>
-              <a:t>Electrical circuits — invented for vacuum-tube radio</a:t>
-            </a:r>
-          </a:p>
-          <a:p>
-            <a:pPr>
-              <a:spcBef>
-                <a:spcPts val="300"/>
-              </a:spcBef>
-              <a:spcAft>
-                <a:spcPts val="200"/>
-              </a:spcAft>
-            </a:pPr>
-            <a:r>
-              <a:rPr sz="1400" b="0">
-                <a:solidFill>
-                  <a:srgbClr val="3C3C3C"/>
-                </a:solidFill>
-              </a:rPr>
-              <a:t>Mechanical systems — vibration isolation, MEMS devices</a:t>
-            </a:r>
-          </a:p>
-          <a:p>
-            <a:pPr>
-              <a:spcBef>
-                <a:spcPts val="300"/>
-              </a:spcBef>
-              <a:spcAft>
-                <a:spcPts val="200"/>
-              </a:spcAft>
-            </a:pPr>
-            <a:r>
-              <a:rPr sz="600" b="0">
-                <a:solidFill>
-                  <a:srgbClr val="3C3C3C"/>
-                </a:solidFill>
-              </a:rPr>
-              <a:t/>
-            </a:r>
-          </a:p>
-          <a:p>
-            <a:pPr>
-              <a:spcBef>
-                <a:spcPts val="300"/>
-              </a:spcBef>
-              <a:spcAft>
-                <a:spcPts val="200"/>
-              </a:spcAft>
-            </a:pPr>
-            <a:r>
-              <a:rPr sz="1700" b="1">
-                <a:solidFill>
-                  <a:srgbClr val="1F4E79"/>
-                </a:solidFill>
-              </a:rPr>
-              <a:t>Climate &amp; Economics</a:t>
-            </a:r>
-          </a:p>
-          <a:p>
-            <a:pPr>
-              <a:spcBef>
-                <a:spcPts val="300"/>
-              </a:spcBef>
-              <a:spcAft>
-                <a:spcPts val="200"/>
-              </a:spcAft>
-            </a:pPr>
-            <a:r>
-              <a:rPr sz="1400" b="0">
-                <a:solidFill>
-                  <a:srgbClr val="3C3C3C"/>
-                </a:solidFill>
-              </a:rPr>
-              <a:t>El Niño oscillations use similar nonlinear ODE structure</a:t>
-            </a:r>
-          </a:p>
-          <a:p>
-            <a:pPr>
-              <a:spcBef>
-                <a:spcPts val="300"/>
-              </a:spcBef>
-              <a:spcAft>
-                <a:spcPts val="200"/>
-              </a:spcAft>
-            </a:pPr>
-            <a:r>
-              <a:rPr sz="1400" b="0">
-                <a:solidFill>
-                  <a:srgbClr val="3C3C3C"/>
-                </a:solidFill>
-              </a:rPr>
-              <a:t>Business cycles modeled as nonlinear oscillators</a:t>
+              <a:t>Business cycles have been modeled as nonlinear oscillators</a:t>
             </a:r>
           </a:p>
         </p:txBody>
@@ -5878,7 +5804,7 @@
         </p:nvSpPr>
         <p:spPr>
           <a:xfrm>
-            <a:off x="6309360" y="1143000"/>
+            <a:off x="6309360" y="1188720"/>
             <a:ext cx="5577840" cy="5394960"/>
           </a:xfrm>
           <a:prstGeom prst="rect">
@@ -5894,10 +5820,56 @@
           <a:p>
             <a:pPr>
               <a:spcBef>
-                <a:spcPts val="300"/>
-              </a:spcBef>
-              <a:spcAft>
+                <a:spcPts val="400"/>
+              </a:spcBef>
+              <a:spcAft>
+                <a:spcPts val="0"/>
+              </a:spcAft>
+            </a:pPr>
+            <a:r>
+              <a:rPr sz="1700" b="1">
+                <a:solidFill>
+                  <a:srgbClr val="C55A11"/>
+                </a:solidFill>
+              </a:rPr>
+              <a:t>Why study the parameter μ?</a:t>
+            </a:r>
+          </a:p>
+          <a:p>
+            <a:pPr>
+              <a:spcBef>
                 <a:spcPts val="200"/>
+              </a:spcBef>
+              <a:spcAft>
+                <a:spcPts val="0"/>
+              </a:spcAft>
+            </a:pPr>
+            <a:r>
+              <a:rPr sz="1400" b="0">
+                <a:solidFill>
+                  <a:srgbClr val="3C3C3C"/>
+                </a:solidFill>
+              </a:rPr>
+              <a:t>In real applications you rarely know the exact parameter. You need to see how behavior shifts across a whole range of μ.</a:t>
+            </a:r>
+          </a:p>
+          <a:p>
+            <a:pPr>
+              <a:spcBef>
+                <a:spcPts val="800"/>
+              </a:spcBef>
+              <a:spcAft>
+                <a:spcPts val="0"/>
+              </a:spcAft>
+            </a:pPr>
+          </a:p>
+          <a:p>
+            <a:pPr>
+              <a:spcBef>
+                <a:spcPts val="0"/>
+              </a:spcBef>
+              <a:spcAft>
+                <a:spcPts val="0"/>
               </a:spcAft>
             </a:pPr>
             <a:r>
@@ -5906,16 +5878,16 @@
                   <a:srgbClr val="C55A11"/>
                 </a:solidFill>
               </a:rPr>
-              <a:t>Why study μ?</a:t>
-            </a:r>
-          </a:p>
-          <a:p>
-            <a:pPr>
-              <a:spcBef>
-                <a:spcPts val="300"/>
-              </a:spcBef>
-              <a:spcAft>
+              <a:t>Why use surrogate models?</a:t>
+            </a:r>
+          </a:p>
+          <a:p>
+            <a:pPr>
+              <a:spcBef>
                 <a:spcPts val="200"/>
+              </a:spcBef>
+              <a:spcAft>
+                <a:spcPts val="0"/>
               </a:spcAft>
             </a:pPr>
             <a:r>
@@ -5924,115 +5896,53 @@
                   <a:srgbClr val="3C3C3C"/>
                 </a:solidFill>
               </a:rPr>
-              <a:t>In real life you rarely know the exact parameter value. You need to understand how behavior changes across a range.</a:t>
-            </a:r>
-          </a:p>
-          <a:p>
-            <a:pPr>
-              <a:spcBef>
-                <a:spcPts val="300"/>
-              </a:spcBef>
-              <a:spcAft>
+              <a:t>Running the full ODE for every μ gets expensive. A surrogate lets you precompute once and query instantly.</a:t>
+            </a:r>
+          </a:p>
+          <a:p>
+            <a:pPr>
+              <a:spcBef>
+                <a:spcPts val="800"/>
+              </a:spcBef>
+              <a:spcAft>
+                <a:spcPts val="0"/>
+              </a:spcAft>
+            </a:pPr>
+          </a:p>
+          <a:p>
+            <a:pPr>
+              <a:spcBef>
+                <a:spcPts val="0"/>
+              </a:spcBef>
+              <a:spcAft>
+                <a:spcPts val="0"/>
+              </a:spcAft>
+            </a:pPr>
+            <a:r>
+              <a:rPr sz="1600" b="1">
+                <a:solidFill>
+                  <a:srgbClr val="1F4E79"/>
+                </a:solidFill>
+              </a:rPr>
+              <a:t>This project does both:</a:t>
+            </a:r>
+          </a:p>
+          <a:p>
+            <a:pPr>
+              <a:spcBef>
                 <a:spcPts val="200"/>
-              </a:spcAft>
-            </a:pPr>
-            <a:r>
-              <a:rPr sz="600" b="0">
-                <a:solidFill>
-                  <a:srgbClr val="3C3C3C"/>
-                </a:solidFill>
-              </a:rPr>
-              <a:t/>
-            </a:r>
-          </a:p>
-          <a:p>
-            <a:pPr>
-              <a:spcBef>
-                <a:spcPts val="300"/>
-              </a:spcBef>
-              <a:spcAft>
-                <a:spcPts val="200"/>
-              </a:spcAft>
-            </a:pPr>
-            <a:r>
-              <a:rPr sz="1700" b="1">
-                <a:solidFill>
-                  <a:srgbClr val="C55A11"/>
-                </a:solidFill>
-              </a:rPr>
-              <a:t>Why use surrogate models?</a:t>
-            </a:r>
-          </a:p>
-          <a:p>
-            <a:pPr>
-              <a:spcBef>
-                <a:spcPts val="300"/>
-              </a:spcBef>
-              <a:spcAft>
-                <a:spcPts val="200"/>
-              </a:spcAft>
-            </a:pPr>
-            <a:r>
-              <a:rPr sz="1400" b="0">
-                <a:solidFill>
-                  <a:srgbClr val="3C3C3C"/>
-                </a:solidFill>
-              </a:rPr>
-              <a:t>Solving the ODE for every μ is expensive. A surrogate lets you approximate results instantly after one-time precomputation.</a:t>
-            </a:r>
-          </a:p>
-          <a:p>
-            <a:pPr>
-              <a:spcBef>
-                <a:spcPts val="300"/>
-              </a:spcBef>
-              <a:spcAft>
-                <a:spcPts val="200"/>
-              </a:spcAft>
-            </a:pPr>
-            <a:r>
-              <a:rPr sz="600" b="0">
-                <a:solidFill>
-                  <a:srgbClr val="3C3C3C"/>
-                </a:solidFill>
-              </a:rPr>
-              <a:t/>
-            </a:r>
-          </a:p>
-          <a:p>
-            <a:pPr>
-              <a:spcBef>
-                <a:spcPts val="300"/>
-              </a:spcBef>
-              <a:spcAft>
-                <a:spcPts val="200"/>
-              </a:spcAft>
-            </a:pPr>
-            <a:r>
-              <a:rPr sz="1600" b="1">
+              </a:spcBef>
+              <a:spcAft>
+                <a:spcPts val="0"/>
+              </a:spcAft>
+            </a:pPr>
+            <a:r>
+              <a:rPr sz="1400" b="1">
                 <a:solidFill>
                   <a:srgbClr val="1F4E79"/>
                 </a:solidFill>
               </a:rPr>
-              <a:t>This project does both:</a:t>
-            </a:r>
-          </a:p>
-          <a:p>
-            <a:pPr>
-              <a:spcBef>
-                <a:spcPts val="300"/>
-              </a:spcBef>
-              <a:spcAft>
-                <a:spcPts val="200"/>
-              </a:spcAft>
-            </a:pPr>
-            <a:r>
-              <a:rPr sz="1400" b="1">
-                <a:solidFill>
-                  <a:srgbClr val="1F4E79"/>
-                </a:solidFill>
-              </a:rPr>
-              <a:t>Explores μ visually AND tests how well surrogates approximate the truth.</a:t>
+              <a:t>Explores μ visually AND tests how well surrogates approximate the true solution.</a:t>
             </a:r>
           </a:p>
         </p:txBody>
@@ -6064,7 +5974,7 @@
         <p:spPr>
           <a:xfrm>
             <a:off x="0" y="0"/>
-            <a:ext cx="12188952" cy="1005840"/>
+            <a:ext cx="12188952" cy="1051560"/>
           </a:xfrm>
           <a:prstGeom prst="rect">
             <a:avLst/>
@@ -6106,8 +6016,8 @@
         </p:nvSpPr>
         <p:spPr>
           <a:xfrm>
-            <a:off x="228600" y="91440"/>
-            <a:ext cx="11704320" cy="777240"/>
+            <a:off x="274320" y="54864"/>
+            <a:ext cx="11640312" cy="640080"/>
           </a:xfrm>
           <a:prstGeom prst="rect">
             <a:avLst/>
@@ -6122,7 +6032,7 @@
           <a:p>
             <a:pPr algn="l"/>
             <a:r>
-              <a:rPr sz="2900" b="1">
+              <a:rPr sz="2800" b="1">
                 <a:solidFill>
                   <a:srgbClr val="FFFFFF"/>
                 </a:solidFill>
@@ -6156,10 +6066,56 @@
           <a:p>
             <a:pPr>
               <a:spcBef>
-                <a:spcPts val="300"/>
-              </a:spcBef>
-              <a:spcAft>
+                <a:spcPts val="600"/>
+              </a:spcBef>
+              <a:spcAft>
+                <a:spcPts val="0"/>
+              </a:spcAft>
+            </a:pPr>
+            <a:r>
+              <a:rPr sz="1700" b="1">
+                <a:solidFill>
+                  <a:srgbClr val="1F4E79"/>
+                </a:solidFill>
+              </a:rPr>
+              <a:t>Step 1: Solve the ODE with RK4</a:t>
+            </a:r>
+          </a:p>
+          <a:p>
+            <a:pPr>
+              <a:spcBef>
                 <a:spcPts val="200"/>
+              </a:spcBef>
+              <a:spcAft>
+                <a:spcPts val="0"/>
+              </a:spcAft>
+            </a:pPr>
+            <a:r>
+              <a:rPr sz="1400" b="0">
+                <a:solidFill>
+                  <a:srgbClr val="3C3C3C"/>
+                </a:solidFill>
+              </a:rPr>
+              <a:t>4th-order Runge-Kutta re-checks trajectory direction 4x per step so small errors do not compound over time.</a:t>
+            </a:r>
+          </a:p>
+          <a:p>
+            <a:pPr>
+              <a:spcBef>
+                <a:spcPts val="800"/>
+              </a:spcBef>
+              <a:spcAft>
+                <a:spcPts val="0"/>
+              </a:spcAft>
+            </a:pPr>
+          </a:p>
+          <a:p>
+            <a:pPr>
+              <a:spcBef>
+                <a:spcPts val="0"/>
+              </a:spcBef>
+              <a:spcAft>
+                <a:spcPts val="0"/>
               </a:spcAft>
             </a:pPr>
             <a:r>
@@ -6168,16 +6124,16 @@
                   <a:srgbClr val="1F4E79"/>
                 </a:solidFill>
               </a:rPr>
-              <a:t>Step 1 — Solve the ODE with RK4</a:t>
-            </a:r>
-          </a:p>
-          <a:p>
-            <a:pPr>
-              <a:spcBef>
-                <a:spcPts val="300"/>
-              </a:spcBef>
-              <a:spcAft>
+              <a:t>Step 2: Choose smart sample points (nodes)</a:t>
+            </a:r>
+          </a:p>
+          <a:p>
+            <a:pPr>
+              <a:spcBef>
                 <a:spcPts val="200"/>
+              </a:spcBef>
+              <a:spcAft>
+                <a:spcPts val="0"/>
               </a:spcAft>
             </a:pPr>
             <a:r>
@@ -6186,52 +6142,90 @@
                   <a:srgbClr val="3C3C3C"/>
                 </a:solidFill>
               </a:rPr>
-              <a:t>4th-order Runge-Kutta: re-checks trajectory direction 4× per step so tiny errors don't compound over time.</a:t>
-            </a:r>
-          </a:p>
-          <a:p>
-            <a:pPr>
-              <a:spcBef>
-                <a:spcPts val="300"/>
-              </a:spcBef>
-              <a:spcAft>
+              <a:t>Equispaced: simple, like measuring every inch. Chebyshev: denser near the edges where polynomials tend to blow up.</a:t>
+            </a:r>
+          </a:p>
+          <a:p>
+            <a:pPr>
+              <a:spcBef>
+                <a:spcPts val="800"/>
+              </a:spcBef>
+              <a:spcAft>
+                <a:spcPts val="0"/>
+              </a:spcAft>
+            </a:pPr>
+          </a:p>
+          <a:p>
+            <a:pPr>
+              <a:spcBef>
+                <a:spcPts val="0"/>
+              </a:spcBef>
+              <a:spcAft>
+                <a:spcPts val="0"/>
+              </a:spcAft>
+            </a:pPr>
+            <a:r>
+              <a:rPr sz="1700" b="1">
+                <a:solidFill>
+                  <a:srgbClr val="1F4E79"/>
+                </a:solidFill>
+              </a:rPr>
+              <a:t>Step 3: Interpolate between samples</a:t>
+            </a:r>
+          </a:p>
+          <a:p>
+            <a:pPr>
+              <a:spcBef>
                 <a:spcPts val="200"/>
-              </a:spcAft>
-            </a:pPr>
-            <a:r>
-              <a:rPr sz="500" b="0">
+              </a:spcBef>
+              <a:spcAft>
+                <a:spcPts val="0"/>
+              </a:spcAft>
+            </a:pPr>
+            <a:r>
+              <a:rPr sz="1400" b="0">
                 <a:solidFill>
                   <a:srgbClr val="3C3C3C"/>
                 </a:solidFill>
               </a:rPr>
-              <a:t/>
-            </a:r>
-          </a:p>
-          <a:p>
-            <a:pPr>
-              <a:spcBef>
-                <a:spcPts val="300"/>
-              </a:spcBef>
-              <a:spcAft>
+              <a:t>Barycentric Lagrange interpolation fills in values between sample points. It is fast, stable, and numerically well-behaved.</a:t>
+            </a:r>
+          </a:p>
+          <a:p>
+            <a:pPr>
+              <a:spcBef>
+                <a:spcPts val="800"/>
+              </a:spcBef>
+              <a:spcAft>
+                <a:spcPts val="0"/>
+              </a:spcAft>
+            </a:pPr>
+          </a:p>
+          <a:p>
+            <a:pPr>
+              <a:spcBef>
+                <a:spcPts val="0"/>
+              </a:spcBef>
+              <a:spcAft>
+                <a:spcPts val="0"/>
+              </a:spcAft>
+            </a:pPr>
+            <a:r>
+              <a:rPr sz="1700" b="1">
+                <a:solidFill>
+                  <a:srgbClr val="1F4E79"/>
+                </a:solidFill>
+              </a:rPr>
+              <a:t>Step 4: Link everything with D3.js</a:t>
+            </a:r>
+          </a:p>
+          <a:p>
+            <a:pPr>
+              <a:spcBef>
                 <a:spcPts val="200"/>
-              </a:spcAft>
-            </a:pPr>
-            <a:r>
-              <a:rPr sz="1700" b="1">
-                <a:solidFill>
-                  <a:srgbClr val="1F4E79"/>
-                </a:solidFill>
-              </a:rPr>
-              <a:t>Step 2 — Choose smart sample points (nodes)</a:t>
-            </a:r>
-          </a:p>
-          <a:p>
-            <a:pPr>
-              <a:spcBef>
-                <a:spcPts val="300"/>
-              </a:spcBef>
-              <a:spcAft>
-                <a:spcPts val="200"/>
+              </a:spcBef>
+              <a:spcAft>
+                <a:spcPts val="0"/>
               </a:spcAft>
             </a:pPr>
             <a:r>
@@ -6240,142 +6234,26 @@
                   <a:srgbClr val="3C3C3C"/>
                 </a:solidFill>
               </a:rPr>
-              <a:t>Equispaced: simple, like measuring every inch.  Chebyshev: denser near edges where polynomials misbehave.</a:t>
-            </a:r>
-          </a:p>
-          <a:p>
-            <a:pPr>
-              <a:spcBef>
-                <a:spcPts val="300"/>
-              </a:spcBef>
-              <a:spcAft>
-                <a:spcPts val="200"/>
-              </a:spcAft>
-            </a:pPr>
-            <a:r>
-              <a:rPr sz="500" b="0">
-                <a:solidFill>
-                  <a:srgbClr val="3C3C3C"/>
-                </a:solidFill>
-              </a:rPr>
-              <a:t/>
-            </a:r>
-          </a:p>
-          <a:p>
-            <a:pPr>
-              <a:spcBef>
-                <a:spcPts val="300"/>
-              </a:spcBef>
-              <a:spcAft>
-                <a:spcPts val="200"/>
-              </a:spcAft>
-            </a:pPr>
-            <a:r>
-              <a:rPr sz="1700" b="1">
-                <a:solidFill>
-                  <a:srgbClr val="1F4E79"/>
-                </a:solidFill>
-              </a:rPr>
-              <a:t>Step 3 — Interpolate between samples</a:t>
-            </a:r>
-          </a:p>
-          <a:p>
-            <a:pPr>
-              <a:spcBef>
-                <a:spcPts val="300"/>
-              </a:spcBef>
-              <a:spcAft>
-                <a:spcPts val="200"/>
-              </a:spcAft>
-            </a:pPr>
-            <a:r>
-              <a:rPr sz="1400" b="0">
-                <a:solidFill>
-                  <a:srgbClr val="3C3C3C"/>
-                </a:solidFill>
-              </a:rPr>
-              <a:t>Barycentric Lagrange interpolation: fills in values between sample points — fast, stable, and numerically sound.</a:t>
-            </a:r>
-          </a:p>
-          <a:p>
-            <a:pPr>
-              <a:spcBef>
-                <a:spcPts val="300"/>
-              </a:spcBef>
-              <a:spcAft>
-                <a:spcPts val="200"/>
-              </a:spcAft>
-            </a:pPr>
-            <a:r>
-              <a:rPr sz="500" b="0">
-                <a:solidFill>
-                  <a:srgbClr val="3C3C3C"/>
-                </a:solidFill>
-              </a:rPr>
-              <a:t/>
-            </a:r>
-          </a:p>
-          <a:p>
-            <a:pPr>
-              <a:spcBef>
-                <a:spcPts val="300"/>
-              </a:spcBef>
-              <a:spcAft>
-                <a:spcPts val="200"/>
-              </a:spcAft>
-            </a:pPr>
-            <a:r>
-              <a:rPr sz="1700" b="1">
-                <a:solidFill>
-                  <a:srgbClr val="1F4E79"/>
-                </a:solidFill>
-              </a:rPr>
-              <a:t>Step 4 — Link everything with D3.js</a:t>
-            </a:r>
-          </a:p>
-          <a:p>
-            <a:pPr>
-              <a:spcBef>
-                <a:spcPts val="300"/>
-              </a:spcBef>
-              <a:spcAft>
-                <a:spcPts val="200"/>
-              </a:spcAft>
-            </a:pPr>
-            <a:r>
-              <a:rPr sz="1400" b="0">
-                <a:solidFill>
-                  <a:srgbClr val="3C3C3C"/>
-                </a:solidFill>
-              </a:rPr>
-              <a:t>Seven interactive pages, each a different lens.  One slider updates every linked chart instantly.</a:t>
-            </a:r>
-          </a:p>
-          <a:p>
-            <a:pPr>
-              <a:spcBef>
-                <a:spcPts val="300"/>
-              </a:spcBef>
-              <a:spcAft>
-                <a:spcPts val="200"/>
-              </a:spcAft>
-            </a:pPr>
-            <a:r>
-              <a:rPr sz="500" b="0">
-                <a:solidFill>
-                  <a:srgbClr val="3C3C3C"/>
-                </a:solidFill>
-              </a:rPr>
-              <a:t/>
-            </a:r>
-          </a:p>
-          <a:p>
-            <a:pPr>
-              <a:spcBef>
-                <a:spcPts val="300"/>
-              </a:spcBef>
-              <a:spcAft>
-                <a:spcPts val="200"/>
+              <a:t>Seven interactive pages, each showing a different angle on the data. Move one slider and every linked chart updates instantly.</a:t>
+            </a:r>
+          </a:p>
+          <a:p>
+            <a:pPr>
+              <a:spcBef>
+                <a:spcPts val="800"/>
+              </a:spcBef>
+              <a:spcAft>
+                <a:spcPts val="0"/>
+              </a:spcAft>
+            </a:pPr>
+          </a:p>
+          <a:p>
+            <a:pPr>
+              <a:spcBef>
+                <a:spcPts val="0"/>
+              </a:spcBef>
+              <a:spcAft>
+                <a:spcPts val="0"/>
               </a:spcAft>
             </a:pPr>
             <a:r>
@@ -6416,7 +6294,7 @@
         <p:spPr>
           <a:xfrm>
             <a:off x="0" y="0"/>
-            <a:ext cx="12188952" cy="1005840"/>
+            <a:ext cx="12188952" cy="1051560"/>
           </a:xfrm>
           <a:prstGeom prst="rect">
             <a:avLst/>
@@ -6458,8 +6336,8 @@
         </p:nvSpPr>
         <p:spPr>
           <a:xfrm>
-            <a:off x="228600" y="45720"/>
-            <a:ext cx="9144000" cy="594360"/>
+            <a:off x="274320" y="54864"/>
+            <a:ext cx="11640312" cy="640080"/>
           </a:xfrm>
           <a:prstGeom prst="rect">
             <a:avLst/>
@@ -6479,7 +6357,7 @@
                   <a:srgbClr val="FFFFFF"/>
                 </a:solidFill>
               </a:rPr>
-              <a:t>Visualization 1 — Effect of μ</a:t>
+              <a:t>Visualization 1: Effect of μ</a:t>
             </a:r>
           </a:p>
         </p:txBody>
@@ -6492,8 +6370,8 @@
         </p:nvSpPr>
         <p:spPr>
           <a:xfrm>
-            <a:off x="228600" y="594360"/>
-            <a:ext cx="9144000" cy="365760"/>
+            <a:off x="274320" y="676656"/>
+            <a:ext cx="11640312" cy="347472"/>
           </a:xfrm>
           <a:prstGeom prst="rect">
             <a:avLst/>
@@ -6513,14 +6391,57 @@
                   <a:srgbClr val="BED2F0"/>
                 </a:solidFill>
               </a:rPr>
-              <a:t>How does changing μ transform the oscillator?</a:t>
-            </a:r>
+              <a:t>How does changing μ transform the oscillator's behavior?</a:t>
+            </a:r>
+          </a:p>
+        </p:txBody>
+      </p:sp>
+      <p:sp>
+        <p:nvSpPr>
+          <p:cNvPr id="5" name="Rectangle 4"/>
+          <p:cNvSpPr/>
+          <p:nvPr/>
+        </p:nvSpPr>
+        <p:spPr>
+          <a:xfrm>
+            <a:off x="91440" y="1078992"/>
+            <a:ext cx="5650992" cy="5504688"/>
+          </a:xfrm>
+          <a:prstGeom prst="rect">
+            <a:avLst/>
+          </a:prstGeom>
+          <a:solidFill>
+            <a:srgbClr val="F0F4FA"/>
+          </a:solidFill>
+          <a:ln>
+            <a:noFill/>
+          </a:ln>
+        </p:spPr>
+        <p:style>
+          <a:lnRef idx="1">
+            <a:schemeClr val="accent1"/>
+          </a:lnRef>
+          <a:fillRef idx="3">
+            <a:schemeClr val="accent1"/>
+          </a:fillRef>
+          <a:effectRef idx="2">
+            <a:schemeClr val="accent1"/>
+          </a:effectRef>
+          <a:fontRef idx="minor">
+            <a:schemeClr val="lt1"/>
+          </a:fontRef>
+        </p:style>
+        <p:txBody>
+          <a:bodyPr rtlCol="0" anchor="ctr"/>
+          <a:lstStyle/>
+          <a:p>
+            <a:pPr algn="ctr"/>
           </a:p>
         </p:txBody>
       </p:sp>
       <p:pic>
         <p:nvPicPr>
-          <p:cNvPr id="5" name="Picture 4" descr="index.png"/>
+          <p:cNvPr id="6" name="Picture 5" descr="index.png"/>
           <p:cNvPicPr>
             <a:picLocks noChangeAspect="1"/>
           </p:cNvPicPr>
@@ -6534,8 +6455,8 @@
         </p:blipFill>
         <p:spPr>
           <a:xfrm>
-            <a:off x="5696712" y="1078992"/>
-            <a:ext cx="6309360" cy="4754880"/>
+            <a:off x="6705442" y="1078992"/>
+            <a:ext cx="4474778" cy="5504688"/>
           </a:xfrm>
           <a:prstGeom prst="rect">
             <a:avLst/>
@@ -6544,14 +6465,14 @@
       </p:pic>
       <p:sp>
         <p:nvSpPr>
-          <p:cNvPr id="6" name="TextBox 5"/>
+          <p:cNvPr id="7" name="TextBox 6"/>
           <p:cNvSpPr txBox="1"/>
           <p:nvPr/>
         </p:nvSpPr>
         <p:spPr>
           <a:xfrm>
-            <a:off x="274320" y="1143000"/>
-            <a:ext cx="5239512" cy="5394960"/>
+            <a:off x="228600" y="1170432"/>
+            <a:ext cx="5376672" cy="5321808"/>
           </a:xfrm>
           <a:prstGeom prst="rect">
             <a:avLst/>
@@ -6566,28 +6487,74 @@
           <a:p>
             <a:pPr>
               <a:spcBef>
-                <a:spcPts val="300"/>
-              </a:spcBef>
-              <a:spcAft>
+                <a:spcPts val="400"/>
+              </a:spcBef>
+              <a:spcAft>
+                <a:spcPts val="0"/>
+              </a:spcAft>
+            </a:pPr>
+            <a:r>
+              <a:rPr sz="1300" b="1">
+                <a:solidFill>
+                  <a:srgbClr val="C55A11"/>
+                </a:solidFill>
+              </a:rPr>
+              <a:t>WHAT</a:t>
+            </a:r>
+          </a:p>
+          <a:p>
+            <a:pPr>
+              <a:spcBef>
                 <a:spcPts val="200"/>
+              </a:spcBef>
+              <a:spcAft>
+                <a:spcPts val="0"/>
+              </a:spcAft>
+            </a:pPr>
+            <a:r>
+              <a:rPr sz="1300" b="0">
+                <a:solidFill>
+                  <a:srgbClr val="3C3C3C"/>
+                </a:solidFill>
+              </a:rPr>
+              <a:t>Side-by-side plots of velocity, position, and phase-portrait loops, all colored by μ. A bottom panel overlays limit cycles from multiple μ values at once.</a:t>
+            </a:r>
+          </a:p>
+          <a:p>
+            <a:pPr>
+              <a:spcBef>
+                <a:spcPts val="600"/>
+              </a:spcBef>
+              <a:spcAft>
+                <a:spcPts val="0"/>
+              </a:spcAft>
+            </a:pPr>
+          </a:p>
+          <a:p>
+            <a:pPr>
+              <a:spcBef>
+                <a:spcPts val="0"/>
+              </a:spcBef>
+              <a:spcAft>
+                <a:spcPts val="0"/>
               </a:spcAft>
             </a:pPr>
             <a:r>
               <a:rPr sz="1300" b="1">
                 <a:solidFill>
-                  <a:srgbClr val="C55A11"/>
-                </a:solidFill>
-              </a:rPr>
-              <a:t>WHAT</a:t>
-            </a:r>
-          </a:p>
-          <a:p>
-            <a:pPr>
-              <a:spcBef>
-                <a:spcPts val="300"/>
-              </a:spcBef>
-              <a:spcAft>
+                  <a:srgbClr val="008C8C"/>
+                </a:solidFill>
+              </a:rPr>
+              <a:t>WHY</a:t>
+            </a:r>
+          </a:p>
+          <a:p>
+            <a:pPr>
+              <a:spcBef>
                 <a:spcPts val="200"/>
+              </a:spcBef>
+              <a:spcAft>
+                <a:spcPts val="0"/>
               </a:spcAft>
             </a:pPr>
             <a:r>
@@ -6596,115 +6563,53 @@
                   <a:srgbClr val="3C3C3C"/>
                 </a:solidFill>
               </a:rPr>
-              <a:t>Side-by-side plots of velocity, position, and phase-portrait loops — all colored by μ. A bottom panel overlays limit cycles for many μ at once.</a:t>
-            </a:r>
-          </a:p>
-          <a:p>
-            <a:pPr>
-              <a:spcBef>
-                <a:spcPts val="300"/>
-              </a:spcBef>
-              <a:spcAft>
+              <a:t>It shows the big picture. One glance lets you see how the oscillator shifts from smooth sine waves at small μ to sharp relaxation oscillations at large μ.</a:t>
+            </a:r>
+          </a:p>
+          <a:p>
+            <a:pPr>
+              <a:spcBef>
+                <a:spcPts val="600"/>
+              </a:spcBef>
+              <a:spcAft>
+                <a:spcPts val="0"/>
+              </a:spcAft>
+            </a:pPr>
+          </a:p>
+          <a:p>
+            <a:pPr>
+              <a:spcBef>
+                <a:spcPts val="0"/>
+              </a:spcBef>
+              <a:spcAft>
+                <a:spcPts val="0"/>
+              </a:spcAft>
+            </a:pPr>
+            <a:r>
+              <a:rPr sz="1300" b="1">
+                <a:solidFill>
+                  <a:srgbClr val="1F4E79"/>
+                </a:solidFill>
+              </a:rPr>
+              <a:t>HOW</a:t>
+            </a:r>
+          </a:p>
+          <a:p>
+            <a:pPr>
+              <a:spcBef>
                 <a:spcPts val="200"/>
-              </a:spcAft>
-            </a:pPr>
-            <a:r>
-              <a:rPr sz="500" b="0">
+              </a:spcBef>
+              <a:spcAft>
+                <a:spcPts val="0"/>
+              </a:spcAft>
+            </a:pPr>
+            <a:r>
+              <a:rPr sz="1300" b="0">
                 <a:solidFill>
                   <a:srgbClr val="3C3C3C"/>
                 </a:solidFill>
               </a:rPr>
-              <a:t/>
-            </a:r>
-          </a:p>
-          <a:p>
-            <a:pPr>
-              <a:spcBef>
-                <a:spcPts val="300"/>
-              </a:spcBef>
-              <a:spcAft>
-                <a:spcPts val="200"/>
-              </a:spcAft>
-            </a:pPr>
-            <a:r>
-              <a:rPr sz="1300" b="1">
-                <a:solidFill>
-                  <a:srgbClr val="008C8C"/>
-                </a:solidFill>
-              </a:rPr>
-              <a:t>WHY</a:t>
-            </a:r>
-          </a:p>
-          <a:p>
-            <a:pPr>
-              <a:spcBef>
-                <a:spcPts val="300"/>
-              </a:spcBef>
-              <a:spcAft>
-                <a:spcPts val="200"/>
-              </a:spcAft>
-            </a:pPr>
-            <a:r>
-              <a:rPr sz="1300" b="0">
-                <a:solidFill>
-                  <a:srgbClr val="3C3C3C"/>
-                </a:solidFill>
-              </a:rPr>
-              <a:t>This is the 'big picture' view. One glance shows how the oscillator shifts from smooth sine waves (small μ) to sharp relaxation oscillations (large μ).</a:t>
-            </a:r>
-          </a:p>
-          <a:p>
-            <a:pPr>
-              <a:spcBef>
-                <a:spcPts val="300"/>
-              </a:spcBef>
-              <a:spcAft>
-                <a:spcPts val="200"/>
-              </a:spcAft>
-            </a:pPr>
-            <a:r>
-              <a:rPr sz="500" b="0">
-                <a:solidFill>
-                  <a:srgbClr val="3C3C3C"/>
-                </a:solidFill>
-              </a:rPr>
-              <a:t/>
-            </a:r>
-          </a:p>
-          <a:p>
-            <a:pPr>
-              <a:spcBef>
-                <a:spcPts val="300"/>
-              </a:spcBef>
-              <a:spcAft>
-                <a:spcPts val="200"/>
-              </a:spcAft>
-            </a:pPr>
-            <a:r>
-              <a:rPr sz="1300" b="1">
-                <a:solidFill>
-                  <a:srgbClr val="1F4E79"/>
-                </a:solidFill>
-              </a:rPr>
-              <a:t>HOW</a:t>
-            </a:r>
-          </a:p>
-          <a:p>
-            <a:pPr>
-              <a:spcBef>
-                <a:spcPts val="300"/>
-              </a:spcBef>
-              <a:spcAft>
-                <a:spcPts val="200"/>
-              </a:spcAft>
-            </a:pPr>
-            <a:r>
-              <a:rPr sz="1300" b="0">
-                <a:solidFill>
-                  <a:srgbClr val="3C3C3C"/>
-                </a:solidFill>
-              </a:rPr>
-              <a:t>RK4 solves the ODE for each μ. D3 renders three linked panels with a plasma color scale. Moving the μ slider updates all three panels simultaneously.</a:t>
+              <a:t>RK4 solves the ODE for each μ. D3 renders three linked panels using a plasma color scale. The μ slider updates all three panels at the same time.</a:t>
             </a:r>
           </a:p>
         </p:txBody>
@@ -6736,7 +6641,7 @@
         <p:spPr>
           <a:xfrm>
             <a:off x="0" y="0"/>
-            <a:ext cx="12188952" cy="1005840"/>
+            <a:ext cx="12188952" cy="1051560"/>
           </a:xfrm>
           <a:prstGeom prst="rect">
             <a:avLst/>
@@ -6778,8 +6683,8 @@
         </p:nvSpPr>
         <p:spPr>
           <a:xfrm>
-            <a:off x="228600" y="45720"/>
-            <a:ext cx="9144000" cy="594360"/>
+            <a:off x="274320" y="54864"/>
+            <a:ext cx="11640312" cy="640080"/>
           </a:xfrm>
           <a:prstGeom prst="rect">
             <a:avLst/>
@@ -6799,7 +6704,7 @@
                   <a:srgbClr val="FFFFFF"/>
                 </a:solidFill>
               </a:rPr>
-              <a:t>Visualization 2 — Time Evolution</a:t>
+              <a:t>Visualization 2: Time Evolution</a:t>
             </a:r>
           </a:p>
         </p:txBody>
@@ -6812,8 +6717,8 @@
         </p:nvSpPr>
         <p:spPr>
           <a:xfrm>
-            <a:off x="228600" y="594360"/>
-            <a:ext cx="9144000" cy="365760"/>
+            <a:off x="274320" y="676656"/>
+            <a:ext cx="11640312" cy="347472"/>
           </a:xfrm>
           <a:prstGeom prst="rect">
             <a:avLst/>
@@ -6833,14 +6738,57 @@
                   <a:srgbClr val="BED2F0"/>
                 </a:solidFill>
               </a:rPr>
-              <a:t>Watch a single trajectory settle onto its steady cycle</a:t>
-            </a:r>
+              <a:t>Watch a single trajectory settle from any starting point onto its steady cycle</a:t>
+            </a:r>
+          </a:p>
+        </p:txBody>
+      </p:sp>
+      <p:sp>
+        <p:nvSpPr>
+          <p:cNvPr id="5" name="Rectangle 4"/>
+          <p:cNvSpPr/>
+          <p:nvPr/>
+        </p:nvSpPr>
+        <p:spPr>
+          <a:xfrm>
+            <a:off x="6446520" y="1078992"/>
+            <a:ext cx="5650992" cy="5504688"/>
+          </a:xfrm>
+          <a:prstGeom prst="rect">
+            <a:avLst/>
+          </a:prstGeom>
+          <a:solidFill>
+            <a:srgbClr val="F0F4FA"/>
+          </a:solidFill>
+          <a:ln>
+            <a:noFill/>
+          </a:ln>
+        </p:spPr>
+        <p:style>
+          <a:lnRef idx="1">
+            <a:schemeClr val="accent1"/>
+          </a:lnRef>
+          <a:fillRef idx="3">
+            <a:schemeClr val="accent1"/>
+          </a:fillRef>
+          <a:effectRef idx="2">
+            <a:schemeClr val="accent1"/>
+          </a:effectRef>
+          <a:fontRef idx="minor">
+            <a:schemeClr val="lt1"/>
+          </a:fontRef>
+        </p:style>
+        <p:txBody>
+          <a:bodyPr rtlCol="0" anchor="ctr"/>
+          <a:lstStyle/>
+          <a:p>
+            <a:pPr algn="ctr"/>
           </a:p>
         </p:txBody>
       </p:sp>
       <p:pic>
         <p:nvPicPr>
-          <p:cNvPr id="5" name="Picture 4" descr="page2.png"/>
+          <p:cNvPr id="6" name="Picture 5" descr="page2.png"/>
           <p:cNvPicPr>
             <a:picLocks noChangeAspect="1"/>
           </p:cNvPicPr>
@@ -6854,8 +6802,8 @@
         </p:blipFill>
         <p:spPr>
           <a:xfrm>
-            <a:off x="182880" y="1078992"/>
-            <a:ext cx="6309360" cy="4754880"/>
+            <a:off x="137160" y="2219092"/>
+            <a:ext cx="6217920" cy="3224487"/>
           </a:xfrm>
           <a:prstGeom prst="rect">
             <a:avLst/>
@@ -6864,14 +6812,14 @@
       </p:pic>
       <p:sp>
         <p:nvSpPr>
-          <p:cNvPr id="6" name="TextBox 5"/>
+          <p:cNvPr id="7" name="TextBox 6"/>
           <p:cNvSpPr txBox="1"/>
           <p:nvPr/>
         </p:nvSpPr>
         <p:spPr>
           <a:xfrm>
-            <a:off x="6766560" y="1143000"/>
-            <a:ext cx="5239512" cy="5394960"/>
+            <a:off x="6583679" y="1170432"/>
+            <a:ext cx="5376672" cy="5321808"/>
           </a:xfrm>
           <a:prstGeom prst="rect">
             <a:avLst/>
@@ -6886,28 +6834,74 @@
           <a:p>
             <a:pPr>
               <a:spcBef>
-                <a:spcPts val="300"/>
-              </a:spcBef>
-              <a:spcAft>
+                <a:spcPts val="400"/>
+              </a:spcBef>
+              <a:spcAft>
+                <a:spcPts val="0"/>
+              </a:spcAft>
+            </a:pPr>
+            <a:r>
+              <a:rPr sz="1300" b="1">
+                <a:solidFill>
+                  <a:srgbClr val="C55A11"/>
+                </a:solidFill>
+              </a:rPr>
+              <a:t>WHAT</a:t>
+            </a:r>
+          </a:p>
+          <a:p>
+            <a:pPr>
+              <a:spcBef>
                 <a:spcPts val="200"/>
+              </a:spcBef>
+              <a:spcAft>
+                <a:spcPts val="0"/>
+              </a:spcAft>
+            </a:pPr>
+            <a:r>
+              <a:rPr sz="1300" b="0">
+                <a:solidFill>
+                  <a:srgbClr val="3C3C3C"/>
+                </a:solidFill>
+              </a:rPr>
+              <a:t>An animated dot moves through phase space on the left while the matching time signal builds up on the right. A dashed curve marks the target limit cycle.</a:t>
+            </a:r>
+          </a:p>
+          <a:p>
+            <a:pPr>
+              <a:spcBef>
+                <a:spcPts val="600"/>
+              </a:spcBef>
+              <a:spcAft>
+                <a:spcPts val="0"/>
+              </a:spcAft>
+            </a:pPr>
+          </a:p>
+          <a:p>
+            <a:pPr>
+              <a:spcBef>
+                <a:spcPts val="0"/>
+              </a:spcBef>
+              <a:spcAft>
+                <a:spcPts val="0"/>
               </a:spcAft>
             </a:pPr>
             <a:r>
               <a:rPr sz="1300" b="1">
                 <a:solidFill>
-                  <a:srgbClr val="C55A11"/>
-                </a:solidFill>
-              </a:rPr>
-              <a:t>WHAT</a:t>
-            </a:r>
-          </a:p>
-          <a:p>
-            <a:pPr>
-              <a:spcBef>
-                <a:spcPts val="300"/>
-              </a:spcBef>
-              <a:spcAft>
+                  <a:srgbClr val="008C8C"/>
+                </a:solidFill>
+              </a:rPr>
+              <a:t>WHY</a:t>
+            </a:r>
+          </a:p>
+          <a:p>
+            <a:pPr>
+              <a:spcBef>
                 <a:spcPts val="200"/>
+              </a:spcBef>
+              <a:spcAft>
+                <a:spcPts val="0"/>
               </a:spcAft>
             </a:pPr>
             <a:r>
@@ -6916,115 +6910,53 @@
                   <a:srgbClr val="3C3C3C"/>
                 </a:solidFill>
               </a:rPr>
-              <a:t>An animated dot moves through phase space (left) while the matching time signal grows on the right. A dashed curve shows the target limit cycle.</a:t>
-            </a:r>
-          </a:p>
-          <a:p>
-            <a:pPr>
-              <a:spcBef>
-                <a:spcPts val="300"/>
-              </a:spcBef>
-              <a:spcAft>
+              <a:t>Most systems start out messy and calm down over time. This animation makes that settling visible. You can watch the system literally forget where it started.</a:t>
+            </a:r>
+          </a:p>
+          <a:p>
+            <a:pPr>
+              <a:spcBef>
+                <a:spcPts val="600"/>
+              </a:spcBef>
+              <a:spcAft>
+                <a:spcPts val="0"/>
+              </a:spcAft>
+            </a:pPr>
+          </a:p>
+          <a:p>
+            <a:pPr>
+              <a:spcBef>
+                <a:spcPts val="0"/>
+              </a:spcBef>
+              <a:spcAft>
+                <a:spcPts val="0"/>
+              </a:spcAft>
+            </a:pPr>
+            <a:r>
+              <a:rPr sz="1300" b="1">
+                <a:solidFill>
+                  <a:srgbClr val="1F4E79"/>
+                </a:solidFill>
+              </a:rPr>
+              <a:t>HOW</a:t>
+            </a:r>
+          </a:p>
+          <a:p>
+            <a:pPr>
+              <a:spcBef>
                 <a:spcPts val="200"/>
-              </a:spcAft>
-            </a:pPr>
-            <a:r>
-              <a:rPr sz="500" b="0">
+              </a:spcBef>
+              <a:spcAft>
+                <a:spcPts val="0"/>
+              </a:spcAft>
+            </a:pPr>
+            <a:r>
+              <a:rPr sz="1300" b="0">
                 <a:solidFill>
                   <a:srgbClr val="3C3C3C"/>
                 </a:solidFill>
               </a:rPr>
-              <a:t/>
-            </a:r>
-          </a:p>
-          <a:p>
-            <a:pPr>
-              <a:spcBef>
-                <a:spcPts val="300"/>
-              </a:spcBef>
-              <a:spcAft>
-                <a:spcPts val="200"/>
-              </a:spcAft>
-            </a:pPr>
-            <a:r>
-              <a:rPr sz="1300" b="1">
-                <a:solidFill>
-                  <a:srgbClr val="008C8C"/>
-                </a:solidFill>
-              </a:rPr>
-              <a:t>WHY</a:t>
-            </a:r>
-          </a:p>
-          <a:p>
-            <a:pPr>
-              <a:spcBef>
-                <a:spcPts val="300"/>
-              </a:spcBef>
-              <a:spcAft>
-                <a:spcPts val="200"/>
-              </a:spcAft>
-            </a:pPr>
-            <a:r>
-              <a:rPr sz="1300" b="0">
-                <a:solidFill>
-                  <a:srgbClr val="3C3C3C"/>
-                </a:solidFill>
-              </a:rPr>
-              <a:t>Most systems start messy and settle down. This animation makes that 'settling' visible — you can literally watch the system forget its initial conditions.</a:t>
-            </a:r>
-          </a:p>
-          <a:p>
-            <a:pPr>
-              <a:spcBef>
-                <a:spcPts val="300"/>
-              </a:spcBef>
-              <a:spcAft>
-                <a:spcPts val="200"/>
-              </a:spcAft>
-            </a:pPr>
-            <a:r>
-              <a:rPr sz="500" b="0">
-                <a:solidFill>
-                  <a:srgbClr val="3C3C3C"/>
-                </a:solidFill>
-              </a:rPr>
-              <a:t/>
-            </a:r>
-          </a:p>
-          <a:p>
-            <a:pPr>
-              <a:spcBef>
-                <a:spcPts val="300"/>
-              </a:spcBef>
-              <a:spcAft>
-                <a:spcPts val="200"/>
-              </a:spcAft>
-            </a:pPr>
-            <a:r>
-              <a:rPr sz="1300" b="1">
-                <a:solidFill>
-                  <a:srgbClr val="1F4E79"/>
-                </a:solidFill>
-              </a:rPr>
-              <a:t>HOW</a:t>
-            </a:r>
-          </a:p>
-          <a:p>
-            <a:pPr>
-              <a:spcBef>
-                <a:spcPts val="300"/>
-              </a:spcBef>
-              <a:spcAft>
-                <a:spcPts val="200"/>
-              </a:spcAft>
-            </a:pPr>
-            <a:r>
-              <a:rPr sz="1300" b="0">
-                <a:solidFill>
-                  <a:srgbClr val="3C3C3C"/>
-                </a:solidFill>
-              </a:rPr>
-              <a:t>The ODE is integrated step-by-step. Each animation frame draws the next path segment in both panels. Play/pause and μ selector give full interactive control.</a:t>
+              <a:t>The ODE integrates step by step. Each frame draws the next segment of the path in both panels. There is a play/pause button and a μ selector for full control.</a:t>
             </a:r>
           </a:p>
         </p:txBody>
@@ -7056,7 +6988,7 @@
         <p:spPr>
           <a:xfrm>
             <a:off x="0" y="0"/>
-            <a:ext cx="12188952" cy="1005840"/>
+            <a:ext cx="12188952" cy="1051560"/>
           </a:xfrm>
           <a:prstGeom prst="rect">
             <a:avLst/>
@@ -7098,8 +7030,8 @@
         </p:nvSpPr>
         <p:spPr>
           <a:xfrm>
-            <a:off x="228600" y="45720"/>
-            <a:ext cx="9144000" cy="594360"/>
+            <a:off x="274320" y="54864"/>
+            <a:ext cx="11640312" cy="640080"/>
           </a:xfrm>
           <a:prstGeom prst="rect">
             <a:avLst/>
@@ -7119,7 +7051,7 @@
                   <a:srgbClr val="FFFFFF"/>
                 </a:solidFill>
               </a:rPr>
-              <a:t>Visualization 3 — Basin of Attraction</a:t>
+              <a:t>Visualization 3: Basin of Attraction</a:t>
             </a:r>
           </a:p>
         </p:txBody>
@@ -7132,8 +7064,8 @@
         </p:nvSpPr>
         <p:spPr>
           <a:xfrm>
-            <a:off x="228600" y="594360"/>
-            <a:ext cx="9144000" cy="365760"/>
+            <a:off x="274320" y="676656"/>
+            <a:ext cx="11640312" cy="347472"/>
           </a:xfrm>
           <a:prstGeom prst="rect">
             <a:avLst/>
@@ -7153,14 +7085,57 @@
                   <a:srgbClr val="BED2F0"/>
                 </a:solidFill>
               </a:rPr>
-              <a:t>Does starting position matter?  Short answer: no.</a:t>
-            </a:r>
+              <a:t>Does the starting position matter?  Short answer: no.</a:t>
+            </a:r>
+          </a:p>
+        </p:txBody>
+      </p:sp>
+      <p:sp>
+        <p:nvSpPr>
+          <p:cNvPr id="5" name="Rectangle 4"/>
+          <p:cNvSpPr/>
+          <p:nvPr/>
+        </p:nvSpPr>
+        <p:spPr>
+          <a:xfrm>
+            <a:off x="91440" y="1078992"/>
+            <a:ext cx="5650992" cy="5504688"/>
+          </a:xfrm>
+          <a:prstGeom prst="rect">
+            <a:avLst/>
+          </a:prstGeom>
+          <a:solidFill>
+            <a:srgbClr val="F0F4FA"/>
+          </a:solidFill>
+          <a:ln>
+            <a:noFill/>
+          </a:ln>
+        </p:spPr>
+        <p:style>
+          <a:lnRef idx="1">
+            <a:schemeClr val="accent1"/>
+          </a:lnRef>
+          <a:fillRef idx="3">
+            <a:schemeClr val="accent1"/>
+          </a:fillRef>
+          <a:effectRef idx="2">
+            <a:schemeClr val="accent1"/>
+          </a:effectRef>
+          <a:fontRef idx="minor">
+            <a:schemeClr val="lt1"/>
+          </a:fontRef>
+        </p:style>
+        <p:txBody>
+          <a:bodyPr rtlCol="0" anchor="ctr"/>
+          <a:lstStyle/>
+          <a:p>
+            <a:pPr algn="ctr"/>
           </a:p>
         </p:txBody>
       </p:sp>
       <p:pic>
         <p:nvPicPr>
-          <p:cNvPr id="5" name="Picture 4" descr="page3.png"/>
+          <p:cNvPr id="6" name="Picture 5" descr="page3.png"/>
           <p:cNvPicPr>
             <a:picLocks noChangeAspect="1"/>
           </p:cNvPicPr>
@@ -7174,8 +7149,8 @@
         </p:blipFill>
         <p:spPr>
           <a:xfrm>
-            <a:off x="5696712" y="1078992"/>
-            <a:ext cx="6309360" cy="4754880"/>
+            <a:off x="6067462" y="1078992"/>
+            <a:ext cx="5750739" cy="5504688"/>
           </a:xfrm>
           <a:prstGeom prst="rect">
             <a:avLst/>
@@ -7184,14 +7159,14 @@
       </p:pic>
       <p:sp>
         <p:nvSpPr>
-          <p:cNvPr id="6" name="TextBox 5"/>
+          <p:cNvPr id="7" name="TextBox 6"/>
           <p:cNvSpPr txBox="1"/>
           <p:nvPr/>
         </p:nvSpPr>
         <p:spPr>
           <a:xfrm>
-            <a:off x="274320" y="1143000"/>
-            <a:ext cx="5239512" cy="5394960"/>
+            <a:off x="228600" y="1170432"/>
+            <a:ext cx="5376672" cy="5321808"/>
           </a:xfrm>
           <a:prstGeom prst="rect">
             <a:avLst/>
@@ -7206,28 +7181,74 @@
           <a:p>
             <a:pPr>
               <a:spcBef>
-                <a:spcPts val="300"/>
-              </a:spcBef>
-              <a:spcAft>
+                <a:spcPts val="400"/>
+              </a:spcBef>
+              <a:spcAft>
+                <a:spcPts val="0"/>
+              </a:spcAft>
+            </a:pPr>
+            <a:r>
+              <a:rPr sz="1300" b="1">
+                <a:solidFill>
+                  <a:srgbClr val="C55A11"/>
+                </a:solidFill>
+              </a:rPr>
+              <a:t>WHAT</a:t>
+            </a:r>
+          </a:p>
+          <a:p>
+            <a:pPr>
+              <a:spcBef>
                 <a:spcPts val="200"/>
+              </a:spcBef>
+              <a:spcAft>
+                <a:spcPts val="0"/>
+              </a:spcAft>
+            </a:pPr>
+            <a:r>
+              <a:rPr sz="1300" b="0">
+                <a:solidFill>
+                  <a:srgbClr val="3C3C3C"/>
+                </a:solidFill>
+              </a:rPr>
+              <a:t>Eight trajectories start at different positions, some inside the limit cycle and some outside. All of them are animated at the same time in phase space.</a:t>
+            </a:r>
+          </a:p>
+          <a:p>
+            <a:pPr>
+              <a:spcBef>
+                <a:spcPts val="600"/>
+              </a:spcBef>
+              <a:spcAft>
+                <a:spcPts val="0"/>
+              </a:spcAft>
+            </a:pPr>
+          </a:p>
+          <a:p>
+            <a:pPr>
+              <a:spcBef>
+                <a:spcPts val="0"/>
+              </a:spcBef>
+              <a:spcAft>
+                <a:spcPts val="0"/>
               </a:spcAft>
             </a:pPr>
             <a:r>
               <a:rPr sz="1300" b="1">
                 <a:solidFill>
-                  <a:srgbClr val="C55A11"/>
-                </a:solidFill>
-              </a:rPr>
-              <a:t>WHAT</a:t>
-            </a:r>
-          </a:p>
-          <a:p>
-            <a:pPr>
-              <a:spcBef>
-                <a:spcPts val="300"/>
-              </a:spcBef>
-              <a:spcAft>
+                  <a:srgbClr val="008C8C"/>
+                </a:solidFill>
+              </a:rPr>
+              <a:t>WHY</a:t>
+            </a:r>
+          </a:p>
+          <a:p>
+            <a:pPr>
+              <a:spcBef>
                 <a:spcPts val="200"/>
+              </a:spcBef>
+              <a:spcAft>
+                <a:spcPts val="0"/>
               </a:spcAft>
             </a:pPr>
             <a:r>
@@ -7236,115 +7257,53 @@
                   <a:srgbClr val="3C3C3C"/>
                 </a:solidFill>
               </a:rPr>
-              <a:t>Eight trajectories start at different positions — some inside the limit cycle, some outside. All are animated simultaneously in phase space.</a:t>
-            </a:r>
-          </a:p>
-          <a:p>
-            <a:pPr>
-              <a:spcBef>
-                <a:spcPts val="300"/>
-              </a:spcBef>
-              <a:spcAft>
+              <a:t>A global attractor means every starting point ends up in the same place. Watching all eight paths converge onto the same dashed oval makes that concrete.</a:t>
+            </a:r>
+          </a:p>
+          <a:p>
+            <a:pPr>
+              <a:spcBef>
+                <a:spcPts val="600"/>
+              </a:spcBef>
+              <a:spcAft>
+                <a:spcPts val="0"/>
+              </a:spcAft>
+            </a:pPr>
+          </a:p>
+          <a:p>
+            <a:pPr>
+              <a:spcBef>
+                <a:spcPts val="0"/>
+              </a:spcBef>
+              <a:spcAft>
+                <a:spcPts val="0"/>
+              </a:spcAft>
+            </a:pPr>
+            <a:r>
+              <a:rPr sz="1300" b="1">
+                <a:solidFill>
+                  <a:srgbClr val="1F4E79"/>
+                </a:solidFill>
+              </a:rPr>
+              <a:t>HOW</a:t>
+            </a:r>
+          </a:p>
+          <a:p>
+            <a:pPr>
+              <a:spcBef>
                 <a:spcPts val="200"/>
-              </a:spcAft>
-            </a:pPr>
-            <a:r>
-              <a:rPr sz="500" b="0">
+              </a:spcBef>
+              <a:spcAft>
+                <a:spcPts val="0"/>
+              </a:spcAft>
+            </a:pPr>
+            <a:r>
+              <a:rPr sz="1300" b="0">
                 <a:solidFill>
                   <a:srgbClr val="3C3C3C"/>
                 </a:solidFill>
               </a:rPr>
-              <a:t/>
-            </a:r>
-          </a:p>
-          <a:p>
-            <a:pPr>
-              <a:spcBef>
-                <a:spcPts val="300"/>
-              </a:spcBef>
-              <a:spcAft>
-                <a:spcPts val="200"/>
-              </a:spcAft>
-            </a:pPr>
-            <a:r>
-              <a:rPr sz="1300" b="1">
-                <a:solidFill>
-                  <a:srgbClr val="008C8C"/>
-                </a:solidFill>
-              </a:rPr>
-              <a:t>WHY</a:t>
-            </a:r>
-          </a:p>
-          <a:p>
-            <a:pPr>
-              <a:spcBef>
-                <a:spcPts val="300"/>
-              </a:spcBef>
-              <a:spcAft>
-                <a:spcPts val="200"/>
-              </a:spcAft>
-            </a:pPr>
-            <a:r>
-              <a:rPr sz="1300" b="0">
-                <a:solidFill>
-                  <a:srgbClr val="3C3C3C"/>
-                </a:solidFill>
-              </a:rPr>
-              <a:t>A 'global attractor' means every starting point ends up in the same place. Watching all eight converge to the same dashed oval confirms the cycle is rock-solid.</a:t>
-            </a:r>
-          </a:p>
-          <a:p>
-            <a:pPr>
-              <a:spcBef>
-                <a:spcPts val="300"/>
-              </a:spcBef>
-              <a:spcAft>
-                <a:spcPts val="200"/>
-              </a:spcAft>
-            </a:pPr>
-            <a:r>
-              <a:rPr sz="500" b="0">
-                <a:solidFill>
-                  <a:srgbClr val="3C3C3C"/>
-                </a:solidFill>
-              </a:rPr>
-              <a:t/>
-            </a:r>
-          </a:p>
-          <a:p>
-            <a:pPr>
-              <a:spcBef>
-                <a:spcPts val="300"/>
-              </a:spcBef>
-              <a:spcAft>
-                <a:spcPts val="200"/>
-              </a:spcAft>
-            </a:pPr>
-            <a:r>
-              <a:rPr sz="1300" b="1">
-                <a:solidFill>
-                  <a:srgbClr val="1F4E79"/>
-                </a:solidFill>
-              </a:rPr>
-              <a:t>HOW</a:t>
-            </a:r>
-          </a:p>
-          <a:p>
-            <a:pPr>
-              <a:spcBef>
-                <a:spcPts val="300"/>
-              </a:spcBef>
-              <a:spcAft>
-                <a:spcPts val="200"/>
-              </a:spcAft>
-            </a:pPr>
-            <a:r>
-              <a:rPr sz="1300" b="0">
-                <a:solidFill>
-                  <a:srgbClr val="3C3C3C"/>
-                </a:solidFill>
-              </a:rPr>
-              <a:t>Eight initial conditions are integrated in parallel. Each gets a unique color. The limit cycle is overlaid as a dashed reference.</a:t>
+              <a:t>Eight initial conditions are integrated in parallel, each with a unique color. The limit cycle is overlaid as a dashed reference curve.</a:t>
             </a:r>
           </a:p>
         </p:txBody>
@@ -7376,7 +7335,7 @@
         <p:spPr>
           <a:xfrm>
             <a:off x="0" y="0"/>
-            <a:ext cx="12188952" cy="1005840"/>
+            <a:ext cx="12188952" cy="1051560"/>
           </a:xfrm>
           <a:prstGeom prst="rect">
             <a:avLst/>
@@ -7418,8 +7377,8 @@
         </p:nvSpPr>
         <p:spPr>
           <a:xfrm>
-            <a:off x="228600" y="45720"/>
-            <a:ext cx="9144000" cy="594360"/>
+            <a:off x="274320" y="54864"/>
+            <a:ext cx="11640312" cy="640080"/>
           </a:xfrm>
           <a:prstGeom prst="rect">
             <a:avLst/>
@@ -7439,7 +7398,7 @@
                   <a:srgbClr val="FFFFFF"/>
                 </a:solidFill>
               </a:rPr>
-              <a:t>Visualization 4 — Vector Field + Nullclines</a:t>
+              <a:t>Visualization 4: Vector Field + Nullclines</a:t>
             </a:r>
           </a:p>
         </p:txBody>
@@ -7452,8 +7411,8 @@
         </p:nvSpPr>
         <p:spPr>
           <a:xfrm>
-            <a:off x="228600" y="594360"/>
-            <a:ext cx="9144000" cy="365760"/>
+            <a:off x="274320" y="676656"/>
+            <a:ext cx="11640312" cy="347472"/>
           </a:xfrm>
           <a:prstGeom prst="rect">
             <a:avLst/>
@@ -7473,14 +7432,57 @@
                   <a:srgbClr val="BED2F0"/>
                 </a:solidFill>
               </a:rPr>
-              <a:t>What forces push the system at every point in space?</a:t>
-            </a:r>
+              <a:t>What forces are pushing the system at every point in phase space?</a:t>
+            </a:r>
+          </a:p>
+        </p:txBody>
+      </p:sp>
+      <p:sp>
+        <p:nvSpPr>
+          <p:cNvPr id="5" name="Rectangle 4"/>
+          <p:cNvSpPr/>
+          <p:nvPr/>
+        </p:nvSpPr>
+        <p:spPr>
+          <a:xfrm>
+            <a:off x="6446520" y="1078992"/>
+            <a:ext cx="5650992" cy="5504688"/>
+          </a:xfrm>
+          <a:prstGeom prst="rect">
+            <a:avLst/>
+          </a:prstGeom>
+          <a:solidFill>
+            <a:srgbClr val="F0F4FA"/>
+          </a:solidFill>
+          <a:ln>
+            <a:noFill/>
+          </a:ln>
+        </p:spPr>
+        <p:style>
+          <a:lnRef idx="1">
+            <a:schemeClr val="accent1"/>
+          </a:lnRef>
+          <a:fillRef idx="3">
+            <a:schemeClr val="accent1"/>
+          </a:fillRef>
+          <a:effectRef idx="2">
+            <a:schemeClr val="accent1"/>
+          </a:effectRef>
+          <a:fontRef idx="minor">
+            <a:schemeClr val="lt1"/>
+          </a:fontRef>
+        </p:style>
+        <p:txBody>
+          <a:bodyPr rtlCol="0" anchor="ctr"/>
+          <a:lstStyle/>
+          <a:p>
+            <a:pPr algn="ctr"/>
           </a:p>
         </p:txBody>
       </p:sp>
       <p:pic>
         <p:nvPicPr>
-          <p:cNvPr id="5" name="Picture 4" descr="page4.png"/>
+          <p:cNvPr id="6" name="Picture 5" descr="page4.png"/>
           <p:cNvPicPr>
             <a:picLocks noChangeAspect="1"/>
           </p:cNvPicPr>
@@ -7494,8 +7496,8 @@
         </p:blipFill>
         <p:spPr>
           <a:xfrm>
-            <a:off x="182880" y="1078992"/>
-            <a:ext cx="6309360" cy="4754880"/>
+            <a:off x="333076" y="1078992"/>
+            <a:ext cx="5826086" cy="5504688"/>
           </a:xfrm>
           <a:prstGeom prst="rect">
             <a:avLst/>
@@ -7504,14 +7506,14 @@
       </p:pic>
       <p:sp>
         <p:nvSpPr>
-          <p:cNvPr id="6" name="TextBox 5"/>
+          <p:cNvPr id="7" name="TextBox 6"/>
           <p:cNvSpPr txBox="1"/>
           <p:nvPr/>
         </p:nvSpPr>
         <p:spPr>
           <a:xfrm>
-            <a:off x="6766560" y="1143000"/>
-            <a:ext cx="5239512" cy="5394960"/>
+            <a:off x="6583679" y="1170432"/>
+            <a:ext cx="5376672" cy="5321808"/>
           </a:xfrm>
           <a:prstGeom prst="rect">
             <a:avLst/>
@@ -7526,28 +7528,74 @@
           <a:p>
             <a:pPr>
               <a:spcBef>
-                <a:spcPts val="300"/>
-              </a:spcBef>
-              <a:spcAft>
+                <a:spcPts val="400"/>
+              </a:spcBef>
+              <a:spcAft>
+                <a:spcPts val="0"/>
+              </a:spcAft>
+            </a:pPr>
+            <a:r>
+              <a:rPr sz="1300" b="1">
+                <a:solidFill>
+                  <a:srgbClr val="C55A11"/>
+                </a:solidFill>
+              </a:rPr>
+              <a:t>WHAT</a:t>
+            </a:r>
+          </a:p>
+          <a:p>
+            <a:pPr>
+              <a:spcBef>
                 <a:spcPts val="200"/>
+              </a:spcBef>
+              <a:spcAft>
+                <a:spcPts val="0"/>
+              </a:spcAft>
+            </a:pPr>
+            <a:r>
+              <a:rPr sz="1300" b="0">
+                <a:solidFill>
+                  <a:srgbClr val="3C3C3C"/>
+                </a:solidFill>
+              </a:rPr>
+              <a:t>A grid of arrows shows the direction and speed of flow at every point in phase space. Two curves called nullclines mark where each derivative equals zero.</a:t>
+            </a:r>
+          </a:p>
+          <a:p>
+            <a:pPr>
+              <a:spcBef>
+                <a:spcPts val="600"/>
+              </a:spcBef>
+              <a:spcAft>
+                <a:spcPts val="0"/>
+              </a:spcAft>
+            </a:pPr>
+          </a:p>
+          <a:p>
+            <a:pPr>
+              <a:spcBef>
+                <a:spcPts val="0"/>
+              </a:spcBef>
+              <a:spcAft>
+                <a:spcPts val="0"/>
               </a:spcAft>
             </a:pPr>
             <a:r>
               <a:rPr sz="1300" b="1">
                 <a:solidFill>
-                  <a:srgbClr val="C55A11"/>
-                </a:solidFill>
-              </a:rPr>
-              <a:t>WHAT</a:t>
-            </a:r>
-          </a:p>
-          <a:p>
-            <a:pPr>
-              <a:spcBef>
-                <a:spcPts val="300"/>
-              </a:spcBef>
-              <a:spcAft>
+                  <a:srgbClr val="008C8C"/>
+                </a:solidFill>
+              </a:rPr>
+              <a:t>WHY</a:t>
+            </a:r>
+          </a:p>
+          <a:p>
+            <a:pPr>
+              <a:spcBef>
                 <a:spcPts val="200"/>
+              </a:spcBef>
+              <a:spcAft>
+                <a:spcPts val="0"/>
               </a:spcAft>
             </a:pPr>
             <a:r>
@@ -7556,115 +7604,53 @@
                   <a:srgbClr val="3C3C3C"/>
                 </a:solidFill>
               </a:rPr>
-              <a:t>A grid of arrows shows which way and how fast the system moves everywhere in phase space. Two special curves (nullclines) mark where each derivative equals zero.</a:t>
-            </a:r>
-          </a:p>
-          <a:p>
-            <a:pPr>
-              <a:spcBef>
-                <a:spcPts val="300"/>
-              </a:spcBef>
-              <a:spcAft>
+              <a:t>Instead of following one trajectory, you see the full terrain. Arrows show where things are headed and nullclines mark the ridges that separate regions of different behavior.</a:t>
+            </a:r>
+          </a:p>
+          <a:p>
+            <a:pPr>
+              <a:spcBef>
+                <a:spcPts val="600"/>
+              </a:spcBef>
+              <a:spcAft>
+                <a:spcPts val="0"/>
+              </a:spcAft>
+            </a:pPr>
+          </a:p>
+          <a:p>
+            <a:pPr>
+              <a:spcBef>
+                <a:spcPts val="0"/>
+              </a:spcBef>
+              <a:spcAft>
+                <a:spcPts val="0"/>
+              </a:spcAft>
+            </a:pPr>
+            <a:r>
+              <a:rPr sz="1300" b="1">
+                <a:solidFill>
+                  <a:srgbClr val="1F4E79"/>
+                </a:solidFill>
+              </a:rPr>
+              <a:t>HOW</a:t>
+            </a:r>
+          </a:p>
+          <a:p>
+            <a:pPr>
+              <a:spcBef>
                 <a:spcPts val="200"/>
-              </a:spcAft>
-            </a:pPr>
-            <a:r>
-              <a:rPr sz="500" b="0">
+              </a:spcBef>
+              <a:spcAft>
+                <a:spcPts val="0"/>
+              </a:spcAft>
+            </a:pPr>
+            <a:r>
+              <a:rPr sz="1300" b="0">
                 <a:solidFill>
                   <a:srgbClr val="3C3C3C"/>
                 </a:solidFill>
               </a:rPr>
-              <a:t/>
-            </a:r>
-          </a:p>
-          <a:p>
-            <a:pPr>
-              <a:spcBef>
-                <a:spcPts val="300"/>
-              </a:spcBef>
-              <a:spcAft>
-                <a:spcPts val="200"/>
-              </a:spcAft>
-            </a:pPr>
-            <a:r>
-              <a:rPr sz="1300" b="1">
-                <a:solidFill>
-                  <a:srgbClr val="008C8C"/>
-                </a:solidFill>
-              </a:rPr>
-              <a:t>WHY</a:t>
-            </a:r>
-          </a:p>
-          <a:p>
-            <a:pPr>
-              <a:spcBef>
-                <a:spcPts val="300"/>
-              </a:spcBef>
-              <a:spcAft>
-                <a:spcPts val="200"/>
-              </a:spcAft>
-            </a:pPr>
-            <a:r>
-              <a:rPr sz="1300" b="0">
-                <a:solidFill>
-                  <a:srgbClr val="3C3C3C"/>
-                </a:solidFill>
-              </a:rPr>
-              <a:t>This is the terrain map of the system. Instead of watching one trajectory you see the full landscape — arrows show flow, nullclines are the ridges separating different behavior.</a:t>
-            </a:r>
-          </a:p>
-          <a:p>
-            <a:pPr>
-              <a:spcBef>
-                <a:spcPts val="300"/>
-              </a:spcBef>
-              <a:spcAft>
-                <a:spcPts val="200"/>
-              </a:spcAft>
-            </a:pPr>
-            <a:r>
-              <a:rPr sz="500" b="0">
-                <a:solidFill>
-                  <a:srgbClr val="3C3C3C"/>
-                </a:solidFill>
-              </a:rPr>
-              <a:t/>
-            </a:r>
-          </a:p>
-          <a:p>
-            <a:pPr>
-              <a:spcBef>
-                <a:spcPts val="300"/>
-              </a:spcBef>
-              <a:spcAft>
-                <a:spcPts val="200"/>
-              </a:spcAft>
-            </a:pPr>
-            <a:r>
-              <a:rPr sz="1300" b="1">
-                <a:solidFill>
-                  <a:srgbClr val="1F4E79"/>
-                </a:solidFill>
-              </a:rPr>
-              <a:t>HOW</a:t>
-            </a:r>
-          </a:p>
-          <a:p>
-            <a:pPr>
-              <a:spcBef>
-                <a:spcPts val="300"/>
-              </a:spcBef>
-              <a:spcAft>
-                <a:spcPts val="200"/>
-              </a:spcAft>
-            </a:pPr>
-            <a:r>
-              <a:rPr sz="1300" b="0">
-                <a:solidFill>
-                  <a:srgbClr val="3C3C3C"/>
-                </a:solidFill>
-              </a:rPr>
-              <a:t>Arrow direction = f(x,ẋ) evaluated on a grid. Nullclines derived analytically. Arrow brightness encodes speed. Limit cycle overlaid numerically.</a:t>
+              <a:t>Arrow direction comes from f(x, x') evaluated on a grid. Nullclines are derived analytically. Brightness encodes speed. The numerical limit cycle is drawn on top.</a:t>
             </a:r>
           </a:p>
         </p:txBody>
@@ -7696,7 +7682,7 @@
         <p:spPr>
           <a:xfrm>
             <a:off x="0" y="0"/>
-            <a:ext cx="12188952" cy="1005840"/>
+            <a:ext cx="12188952" cy="1051560"/>
           </a:xfrm>
           <a:prstGeom prst="rect">
             <a:avLst/>
@@ -7738,8 +7724,8 @@
         </p:nvSpPr>
         <p:spPr>
           <a:xfrm>
-            <a:off x="228600" y="45720"/>
-            <a:ext cx="9144000" cy="594360"/>
+            <a:off x="274320" y="54864"/>
+            <a:ext cx="11640312" cy="640080"/>
           </a:xfrm>
           <a:prstGeom prst="rect">
             <a:avLst/>
@@ -7759,7 +7745,7 @@
                   <a:srgbClr val="FFFFFF"/>
                 </a:solidFill>
               </a:rPr>
-              <a:t>Visualization 5 — Amplitude &amp; Period vs μ</a:t>
+              <a:t>Visualization 5: Amplitude &amp; Period vs μ</a:t>
             </a:r>
           </a:p>
         </p:txBody>
@@ -7772,8 +7758,8 @@
         </p:nvSpPr>
         <p:spPr>
           <a:xfrm>
-            <a:off x="228600" y="594360"/>
-            <a:ext cx="9144000" cy="365760"/>
+            <a:off x="274320" y="676656"/>
+            <a:ext cx="11640312" cy="347472"/>
           </a:xfrm>
           <a:prstGeom prst="rect">
             <a:avLst/>
@@ -7793,14 +7779,57 @@
                   <a:srgbClr val="BED2F0"/>
                 </a:solidFill>
               </a:rPr>
-              <a:t>How do the size and timing of oscillation change with μ?</a:t>
-            </a:r>
+              <a:t>How do the size and timing of oscillations change with μ?</a:t>
+            </a:r>
+          </a:p>
+        </p:txBody>
+      </p:sp>
+      <p:sp>
+        <p:nvSpPr>
+          <p:cNvPr id="5" name="Rectangle 4"/>
+          <p:cNvSpPr/>
+          <p:nvPr/>
+        </p:nvSpPr>
+        <p:spPr>
+          <a:xfrm>
+            <a:off x="91440" y="1078992"/>
+            <a:ext cx="5650992" cy="5504688"/>
+          </a:xfrm>
+          <a:prstGeom prst="rect">
+            <a:avLst/>
+          </a:prstGeom>
+          <a:solidFill>
+            <a:srgbClr val="F0F4FA"/>
+          </a:solidFill>
+          <a:ln>
+            <a:noFill/>
+          </a:ln>
+        </p:spPr>
+        <p:style>
+          <a:lnRef idx="1">
+            <a:schemeClr val="accent1"/>
+          </a:lnRef>
+          <a:fillRef idx="3">
+            <a:schemeClr val="accent1"/>
+          </a:fillRef>
+          <a:effectRef idx="2">
+            <a:schemeClr val="accent1"/>
+          </a:effectRef>
+          <a:fontRef idx="minor">
+            <a:schemeClr val="lt1"/>
+          </a:fontRef>
+        </p:style>
+        <p:txBody>
+          <a:bodyPr rtlCol="0" anchor="ctr"/>
+          <a:lstStyle/>
+          <a:p>
+            <a:pPr algn="ctr"/>
           </a:p>
         </p:txBody>
       </p:sp>
       <p:pic>
         <p:nvPicPr>
-          <p:cNvPr id="5" name="Picture 4" descr="page5.png"/>
+          <p:cNvPr id="6" name="Picture 5" descr="page5.png"/>
           <p:cNvPicPr>
             <a:picLocks noChangeAspect="1"/>
           </p:cNvPicPr>
@@ -7814,8 +7843,8 @@
         </p:blipFill>
         <p:spPr>
           <a:xfrm>
-            <a:off x="5696712" y="1078992"/>
-            <a:ext cx="6309360" cy="4754880"/>
+            <a:off x="5833872" y="2213082"/>
+            <a:ext cx="6217920" cy="3236507"/>
           </a:xfrm>
           <a:prstGeom prst="rect">
             <a:avLst/>
@@ -7824,14 +7853,14 @@
       </p:pic>
       <p:sp>
         <p:nvSpPr>
-          <p:cNvPr id="6" name="TextBox 5"/>
+          <p:cNvPr id="7" name="TextBox 6"/>
           <p:cNvSpPr txBox="1"/>
           <p:nvPr/>
         </p:nvSpPr>
         <p:spPr>
           <a:xfrm>
-            <a:off x="274320" y="1143000"/>
-            <a:ext cx="5239512" cy="5394960"/>
+            <a:off x="228600" y="1170432"/>
+            <a:ext cx="5376672" cy="5321808"/>
           </a:xfrm>
           <a:prstGeom prst="rect">
             <a:avLst/>
@@ -7846,28 +7875,74 @@
           <a:p>
             <a:pPr>
               <a:spcBef>
-                <a:spcPts val="300"/>
-              </a:spcBef>
-              <a:spcAft>
+                <a:spcPts val="400"/>
+              </a:spcBef>
+              <a:spcAft>
+                <a:spcPts val="0"/>
+              </a:spcAft>
+            </a:pPr>
+            <a:r>
+              <a:rPr sz="1300" b="1">
+                <a:solidFill>
+                  <a:srgbClr val="C55A11"/>
+                </a:solidFill>
+              </a:rPr>
+              <a:t>WHAT</a:t>
+            </a:r>
+          </a:p>
+          <a:p>
+            <a:pPr>
+              <a:spcBef>
                 <a:spcPts val="200"/>
+              </a:spcBef>
+              <a:spcAft>
+                <a:spcPts val="0"/>
+              </a:spcAft>
+            </a:pPr>
+            <a:r>
+              <a:rPr sz="1300" b="0">
+                <a:solidFill>
+                  <a:srgbClr val="3C3C3C"/>
+                </a:solidFill>
+              </a:rPr>
+              <a:t>Two line charts: amplitude (max |x|) on top and period (T) on the bottom, both plotted against μ. A dashed line marks the linear harmonic period of 2π.</a:t>
+            </a:r>
+          </a:p>
+          <a:p>
+            <a:pPr>
+              <a:spcBef>
+                <a:spcPts val="600"/>
+              </a:spcBef>
+              <a:spcAft>
+                <a:spcPts val="0"/>
+              </a:spcAft>
+            </a:pPr>
+          </a:p>
+          <a:p>
+            <a:pPr>
+              <a:spcBef>
+                <a:spcPts val="0"/>
+              </a:spcBef>
+              <a:spcAft>
+                <a:spcPts val="0"/>
               </a:spcAft>
             </a:pPr>
             <a:r>
               <a:rPr sz="1300" b="1">
                 <a:solidFill>
-                  <a:srgbClr val="C55A11"/>
-                </a:solidFill>
-              </a:rPr>
-              <a:t>WHAT</a:t>
-            </a:r>
-          </a:p>
-          <a:p>
-            <a:pPr>
-              <a:spcBef>
-                <a:spcPts val="300"/>
-              </a:spcBef>
-              <a:spcAft>
+                  <a:srgbClr val="008C8C"/>
+                </a:solidFill>
+              </a:rPr>
+              <a:t>WHY</a:t>
+            </a:r>
+          </a:p>
+          <a:p>
+            <a:pPr>
+              <a:spcBef>
                 <a:spcPts val="200"/>
+              </a:spcBef>
+              <a:spcAft>
+                <a:spcPts val="0"/>
               </a:spcAft>
             </a:pPr>
             <a:r>
@@ -7876,115 +7951,53 @@
                   <a:srgbClr val="3C3C3C"/>
                 </a:solidFill>
               </a:rPr>
-              <a:t>Two line charts: amplitude (max |x|) above, period (T) below, both plotted against μ. A dashed reference marks the linear harmonic period 2π.</a:t>
-            </a:r>
-          </a:p>
-          <a:p>
-            <a:pPr>
-              <a:spcBef>
-                <a:spcPts val="300"/>
-              </a:spcBef>
-              <a:spcAft>
+              <a:t>Instead of just looking at shapes, you get actual numbers. You can pinpoint exactly where the linear approximation starts to break down, which matters a lot for real-world use.</a:t>
+            </a:r>
+          </a:p>
+          <a:p>
+            <a:pPr>
+              <a:spcBef>
+                <a:spcPts val="600"/>
+              </a:spcBef>
+              <a:spcAft>
+                <a:spcPts val="0"/>
+              </a:spcAft>
+            </a:pPr>
+          </a:p>
+          <a:p>
+            <a:pPr>
+              <a:spcBef>
+                <a:spcPts val="0"/>
+              </a:spcBef>
+              <a:spcAft>
+                <a:spcPts val="0"/>
+              </a:spcAft>
+            </a:pPr>
+            <a:r>
+              <a:rPr sz="1300" b="1">
+                <a:solidFill>
+                  <a:srgbClr val="1F4E79"/>
+                </a:solidFill>
+              </a:rPr>
+              <a:t>HOW</a:t>
+            </a:r>
+          </a:p>
+          <a:p>
+            <a:pPr>
+              <a:spcBef>
                 <a:spcPts val="200"/>
-              </a:spcAft>
-            </a:pPr>
-            <a:r>
-              <a:rPr sz="500" b="0">
+              </a:spcBef>
+              <a:spcAft>
+                <a:spcPts val="0"/>
+              </a:spcAft>
+            </a:pPr>
+            <a:r>
+              <a:rPr sz="1300" b="0">
                 <a:solidFill>
                   <a:srgbClr val="3C3C3C"/>
                 </a:solidFill>
               </a:rPr>
-              <a:t/>
-            </a:r>
-          </a:p>
-          <a:p>
-            <a:pPr>
-              <a:spcBef>
-                <a:spcPts val="300"/>
-              </a:spcBef>
-              <a:spcAft>
-                <a:spcPts val="200"/>
-              </a:spcAft>
-            </a:pPr>
-            <a:r>
-              <a:rPr sz="1300" b="1">
-                <a:solidFill>
-                  <a:srgbClr val="008C8C"/>
-                </a:solidFill>
-              </a:rPr>
-              <a:t>WHY</a:t>
-            </a:r>
-          </a:p>
-          <a:p>
-            <a:pPr>
-              <a:spcBef>
-                <a:spcPts val="300"/>
-              </a:spcBef>
-              <a:spcAft>
-                <a:spcPts val="200"/>
-              </a:spcAft>
-            </a:pPr>
-            <a:r>
-              <a:rPr sz="1300" b="0">
-                <a:solidFill>
-                  <a:srgbClr val="3C3C3C"/>
-                </a:solidFill>
-              </a:rPr>
-              <a:t>Instead of qualitative shapes this gives you numbers. You can spot exactly where the linear approximation breaks down — critical for real-world calibration.</a:t>
-            </a:r>
-          </a:p>
-          <a:p>
-            <a:pPr>
-              <a:spcBef>
-                <a:spcPts val="300"/>
-              </a:spcBef>
-              <a:spcAft>
-                <a:spcPts val="200"/>
-              </a:spcAft>
-            </a:pPr>
-            <a:r>
-              <a:rPr sz="500" b="0">
-                <a:solidFill>
-                  <a:srgbClr val="3C3C3C"/>
-                </a:solidFill>
-              </a:rPr>
-              <a:t/>
-            </a:r>
-          </a:p>
-          <a:p>
-            <a:pPr>
-              <a:spcBef>
-                <a:spcPts val="300"/>
-              </a:spcBef>
-              <a:spcAft>
-                <a:spcPts val="200"/>
-              </a:spcAft>
-            </a:pPr>
-            <a:r>
-              <a:rPr sz="1300" b="1">
-                <a:solidFill>
-                  <a:srgbClr val="1F4E79"/>
-                </a:solidFill>
-              </a:rPr>
-              <a:t>HOW</a:t>
-            </a:r>
-          </a:p>
-          <a:p>
-            <a:pPr>
-              <a:spcBef>
-                <a:spcPts val="300"/>
-              </a:spcBef>
-              <a:spcAft>
-                <a:spcPts val="200"/>
-              </a:spcAft>
-            </a:pPr>
-            <a:r>
-              <a:rPr sz="1300" b="0">
-                <a:solidFill>
-                  <a:srgbClr val="3C3C3C"/>
-                </a:solidFill>
-              </a:rPr>
-              <a:t>For each μ, RK4 runs past the transient. Amplitude = max|x| post-transient. Period detected from successive zero-crossings. Both plotted as connected segments.</a:t>
+              <a:t>For each μ, RK4 runs past the transient. Amplitude is max|x| after the transient. Period is measured from successive zero-crossings. Both are plotted as connected segments.</a:t>
             </a:r>
           </a:p>
         </p:txBody>
